--- a/public/lessons/year-6-maths/autumn/week-2/reason-about-rounding-boundaries/teaching-powerpoint-v1.pptx
+++ b/public/lessons/year-6-maths/autumn/week-2/reason-about-rounding-boundaries/teaching-powerpoint-v1.pptx
@@ -2,24 +2,24 @@
 <file path=ppt/presentation.xml><?xml version="1.0" encoding="utf-8"?>
 <p:presentation xmlns:p="http://schemas.openxmlformats.org/presentationml/2006/main">
   <p:sldMasterIdLst>
-    <p:sldMasterId xmlns:r="http://schemas.openxmlformats.org/officeDocument/2006/relationships" id="2147483648" r:id="R0b1c679c69dc41d3"/>
+    <p:sldMasterId xmlns:r="http://schemas.openxmlformats.org/officeDocument/2006/relationships" id="2147483648" r:id="R54ab3ca9aebc46a7"/>
   </p:sldMasterIdLst>
   <p:notesMasterIdLst>
-    <p:notesMasterId xmlns:r="http://schemas.openxmlformats.org/officeDocument/2006/relationships" r:id="Rb9ca86bbc63c4611"/>
+    <p:notesMasterId xmlns:r="http://schemas.openxmlformats.org/officeDocument/2006/relationships" r:id="Rd695e58355f8434e"/>
   </p:notesMasterIdLst>
   <p:sldIdLst>
-    <p:sldId xmlns:r="http://schemas.openxmlformats.org/officeDocument/2006/relationships" id="256" r:id="R1d8e00d1d0644bdf"/>
-    <p:sldId xmlns:r="http://schemas.openxmlformats.org/officeDocument/2006/relationships" id="257" r:id="Rd75c5d4acac04898"/>
-    <p:sldId xmlns:r="http://schemas.openxmlformats.org/officeDocument/2006/relationships" id="258" r:id="R86af820ebb93445d"/>
-    <p:sldId xmlns:r="http://schemas.openxmlformats.org/officeDocument/2006/relationships" id="259" r:id="R0706073c8d9243e9"/>
-    <p:sldId xmlns:r="http://schemas.openxmlformats.org/officeDocument/2006/relationships" id="260" r:id="R65195703e0eb42c3"/>
-    <p:sldId xmlns:r="http://schemas.openxmlformats.org/officeDocument/2006/relationships" id="261" r:id="R17be53c5ec744823"/>
-    <p:sldId xmlns:r="http://schemas.openxmlformats.org/officeDocument/2006/relationships" id="262" r:id="Rcb5cbe7ee27d420a"/>
-    <p:sldId xmlns:r="http://schemas.openxmlformats.org/officeDocument/2006/relationships" id="263" r:id="R8c42cae33ce74a8e"/>
-    <p:sldId xmlns:r="http://schemas.openxmlformats.org/officeDocument/2006/relationships" id="264" r:id="R06cf4e9a8396490d"/>
-    <p:sldId xmlns:r="http://schemas.openxmlformats.org/officeDocument/2006/relationships" id="265" r:id="R3a59ba9639ca4cf9"/>
-    <p:sldId xmlns:r="http://schemas.openxmlformats.org/officeDocument/2006/relationships" id="266" r:id="R0f7a01e3b4dc4714"/>
-    <p:sldId xmlns:r="http://schemas.openxmlformats.org/officeDocument/2006/relationships" id="267" r:id="Rdbc172d45f944f1c"/>
+    <p:sldId xmlns:r="http://schemas.openxmlformats.org/officeDocument/2006/relationships" id="256" r:id="Rf4bfee82b8434552"/>
+    <p:sldId xmlns:r="http://schemas.openxmlformats.org/officeDocument/2006/relationships" id="257" r:id="R97798f54468e4f4a"/>
+    <p:sldId xmlns:r="http://schemas.openxmlformats.org/officeDocument/2006/relationships" id="258" r:id="Rdf5889f723d6416a"/>
+    <p:sldId xmlns:r="http://schemas.openxmlformats.org/officeDocument/2006/relationships" id="259" r:id="R2be0dfdc97ef43a0"/>
+    <p:sldId xmlns:r="http://schemas.openxmlformats.org/officeDocument/2006/relationships" id="260" r:id="Rbfbb395163f143a9"/>
+    <p:sldId xmlns:r="http://schemas.openxmlformats.org/officeDocument/2006/relationships" id="261" r:id="Rff77a6203a6d4815"/>
+    <p:sldId xmlns:r="http://schemas.openxmlformats.org/officeDocument/2006/relationships" id="262" r:id="R70c5ad3eb4ad44ce"/>
+    <p:sldId xmlns:r="http://schemas.openxmlformats.org/officeDocument/2006/relationships" id="263" r:id="R8a13b746d3864f15"/>
+    <p:sldId xmlns:r="http://schemas.openxmlformats.org/officeDocument/2006/relationships" id="264" r:id="Rbd6e96d3cde7471e"/>
+    <p:sldId xmlns:r="http://schemas.openxmlformats.org/officeDocument/2006/relationships" id="265" r:id="R626ae6b3db544bf5"/>
+    <p:sldId xmlns:r="http://schemas.openxmlformats.org/officeDocument/2006/relationships" id="266" r:id="Ra267374ecbf04b91"/>
+    <p:sldId xmlns:r="http://schemas.openxmlformats.org/officeDocument/2006/relationships" id="267" r:id="R73fb1c9904064796"/>
   </p:sldIdLst>
   <p:sldSz cx="12192000" cy="6858000"/>
   <p:notesSz cx="6858000" cy="9144000"/>
@@ -873,7 +873,7 @@
           <a:lstStyle xmlns:a="http://schemas.openxmlformats.org/drawingml/2006/main"/>
           <a:p xmlns:a="http://schemas.openxmlformats.org/drawingml/2006/main">
             <a:r>
-              <a:t>I do. Reveal the question, setup and each calculation stage one click at a time. Pupils watch before copying. Model answer: 85,500.</a:t>
+              <a:t>I do. Reveal the question, then reveal each mathematical change one click at a time. Point to the numbers and operation that changed before moving to the next line. Final answer: 85,500.</a:t>
             </a:r>
           </a:p>
         </p:txBody>
@@ -1291,7 +1291,7 @@
   </p:cSld>
   <p:clrMap bg1="lt1" tx1="dk1" bg2="lt2" tx2="dk2" accent1="accent1" accent2="accent2" accent3="accent3" accent4="accent4" accent5="accent5" accent6="accent6" hlink="hlink" folHlink="folHlink"/>
   <p:sldLayoutIdLst>
-    <p:sldLayoutId xmlns:r="http://schemas.openxmlformats.org/officeDocument/2006/relationships" id="2147483649" r:id="Rcf5602fcd05a427d"/>
+    <p:sldLayoutId xmlns:r="http://schemas.openxmlformats.org/officeDocument/2006/relationships" id="2147483649" r:id="R23f0117921d74faf"/>
   </p:sldLayoutIdLst>
   <p:txStyles>
     <p:titleStyle>
@@ -1842,7 +1842,7 @@
           <p:cNvPr id="12" name="">
             <a:extLst xmlns:a="http://schemas.openxmlformats.org/drawingml/2006/main">
               <a:ext uri="{FF2B5EF4-FFF2-40B4-BE49-F238E27FC236}">
-                <a16:creationId xmlns:a16="http://schemas.microsoft.com/office/drawing/2014/main" id="{28A69930-7BA3-48C8-BF6A-A9D4AAA982F3}"/>
+                <a16:creationId xmlns:a16="http://schemas.microsoft.com/office/drawing/2014/main" id="{C175576F-A72F-49AC-9E81-5F8B31E02639}"/>
               </a:ext>
             </a:extLst>
           </p:cNvPr>
@@ -1874,7 +1874,7 @@
           <p:cNvPr id="2" name="">
             <a:extLst xmlns:a="http://schemas.openxmlformats.org/drawingml/2006/main">
               <a:ext uri="{FF2B5EF4-FFF2-40B4-BE49-F238E27FC236}">
-                <a16:creationId xmlns:a16="http://schemas.microsoft.com/office/drawing/2014/main" id="{F9205949-F8F6-4253-B1C1-20D6E8D7C8AF}"/>
+                <a16:creationId xmlns:a16="http://schemas.microsoft.com/office/drawing/2014/main" id="{C7DFB2AA-5451-466A-9D5A-5933F7E3D8E8}"/>
               </a:ext>
             </a:extLst>
           </p:cNvPr>
@@ -1931,7 +1931,7 @@
           <p:cNvPr id="3" name="">
             <a:extLst xmlns:a="http://schemas.openxmlformats.org/drawingml/2006/main">
               <a:ext uri="{FF2B5EF4-FFF2-40B4-BE49-F238E27FC236}">
-                <a16:creationId xmlns:a16="http://schemas.microsoft.com/office/drawing/2014/main" id="{0B479B7B-3E7E-47F0-BFA7-61637DBFBC10}"/>
+                <a16:creationId xmlns:a16="http://schemas.microsoft.com/office/drawing/2014/main" id="{2A09DF29-4515-4705-AEC4-F38AF5F80749}"/>
               </a:ext>
             </a:extLst>
           </p:cNvPr>
@@ -1965,7 +1965,7 @@
           <p:cNvPr id="4" name="">
             <a:extLst xmlns:a="http://schemas.openxmlformats.org/drawingml/2006/main">
               <a:ext uri="{FF2B5EF4-FFF2-40B4-BE49-F238E27FC236}">
-                <a16:creationId xmlns:a16="http://schemas.microsoft.com/office/drawing/2014/main" id="{E9DE5BDA-A933-412C-8B18-C6F3D42DF57D}"/>
+                <a16:creationId xmlns:a16="http://schemas.microsoft.com/office/drawing/2014/main" id="{3360F85A-1949-4FB7-81A9-8498E683D35D}"/>
               </a:ext>
             </a:extLst>
           </p:cNvPr>
@@ -2022,7 +2022,7 @@
           <p:cNvPr id="5" name="">
             <a:extLst xmlns:a="http://schemas.openxmlformats.org/drawingml/2006/main">
               <a:ext uri="{FF2B5EF4-FFF2-40B4-BE49-F238E27FC236}">
-                <a16:creationId xmlns:a16="http://schemas.microsoft.com/office/drawing/2014/main" id="{D656D46E-7278-484B-919E-A3AEF55EB012}"/>
+                <a16:creationId xmlns:a16="http://schemas.microsoft.com/office/drawing/2014/main" id="{62D9D8E0-36A7-493F-9C9E-829E94679DA4}"/>
               </a:ext>
             </a:extLst>
           </p:cNvPr>
@@ -2079,7 +2079,7 @@
           <p:cNvPr id="6" name="">
             <a:extLst xmlns:a="http://schemas.openxmlformats.org/drawingml/2006/main">
               <a:ext uri="{FF2B5EF4-FFF2-40B4-BE49-F238E27FC236}">
-                <a16:creationId xmlns:a16="http://schemas.microsoft.com/office/drawing/2014/main" id="{4457B930-E667-4C98-9C32-FF78153384C7}"/>
+                <a16:creationId xmlns:a16="http://schemas.microsoft.com/office/drawing/2014/main" id="{DB123A45-8A27-4DF6-BF60-295FFB4A71B1}"/>
               </a:ext>
             </a:extLst>
           </p:cNvPr>
@@ -2113,7 +2113,7 @@
           <p:cNvPr id="7" name="">
             <a:extLst xmlns:a="http://schemas.openxmlformats.org/drawingml/2006/main">
               <a:ext uri="{FF2B5EF4-FFF2-40B4-BE49-F238E27FC236}">
-                <a16:creationId xmlns:a16="http://schemas.microsoft.com/office/drawing/2014/main" id="{8F552A5A-76FE-4250-9AE1-ED5D3B04E877}"/>
+                <a16:creationId xmlns:a16="http://schemas.microsoft.com/office/drawing/2014/main" id="{08D80AD1-63AD-4826-842C-B22C45BE6D7C}"/>
               </a:ext>
             </a:extLst>
           </p:cNvPr>
@@ -2170,7 +2170,7 @@
           <p:cNvPr id="8" name="">
             <a:extLst xmlns:a="http://schemas.openxmlformats.org/drawingml/2006/main">
               <a:ext uri="{FF2B5EF4-FFF2-40B4-BE49-F238E27FC236}">
-                <a16:creationId xmlns:a16="http://schemas.microsoft.com/office/drawing/2014/main" id="{64D7523A-349F-4621-BB38-1538246B5DA5}"/>
+                <a16:creationId xmlns:a16="http://schemas.microsoft.com/office/drawing/2014/main" id="{B296B1CB-8E3B-472E-8446-2B5D9488290A}"/>
               </a:ext>
             </a:extLst>
           </p:cNvPr>
@@ -2227,7 +2227,7 @@
           <p:cNvPr id="9" name="">
             <a:extLst xmlns:a="http://schemas.openxmlformats.org/drawingml/2006/main">
               <a:ext uri="{FF2B5EF4-FFF2-40B4-BE49-F238E27FC236}">
-                <a16:creationId xmlns:a16="http://schemas.microsoft.com/office/drawing/2014/main" id="{B08F5821-A42B-4674-B9F0-EF07F8B2461C}"/>
+                <a16:creationId xmlns:a16="http://schemas.microsoft.com/office/drawing/2014/main" id="{153146F7-6CCF-4C23-81A7-FE1A1B5078B0}"/>
               </a:ext>
             </a:extLst>
           </p:cNvPr>
@@ -2284,7 +2284,7 @@
           <p:cNvPr id="10" name="">
             <a:extLst xmlns:a="http://schemas.openxmlformats.org/drawingml/2006/main">
               <a:ext uri="{FF2B5EF4-FFF2-40B4-BE49-F238E27FC236}">
-                <a16:creationId xmlns:a16="http://schemas.microsoft.com/office/drawing/2014/main" id="{A28B65C7-2EBF-4F33-A833-D3603E5859C0}"/>
+                <a16:creationId xmlns:a16="http://schemas.microsoft.com/office/drawing/2014/main" id="{E963854C-65B1-4E8D-BBBD-11FC3733CBD8}"/>
               </a:ext>
             </a:extLst>
           </p:cNvPr>
@@ -2341,7 +2341,7 @@
           <p:cNvPr id="11" name="">
             <a:extLst xmlns:a="http://schemas.openxmlformats.org/drawingml/2006/main">
               <a:ext uri="{FF2B5EF4-FFF2-40B4-BE49-F238E27FC236}">
-                <a16:creationId xmlns:a16="http://schemas.microsoft.com/office/drawing/2014/main" id="{BDDDF004-33C0-47CA-9B28-F5BB0B4AE646}"/>
+                <a16:creationId xmlns:a16="http://schemas.microsoft.com/office/drawing/2014/main" id="{A14C1E62-D806-4063-97E4-EA357B838011}"/>
               </a:ext>
             </a:extLst>
           </p:cNvPr>
@@ -2396,7 +2396,7 @@
     </p:spTree>
     <p:extLst>
       <p:ext uri="{BB962C8B-B14F-4D97-AF65-F5344CB8AC3E}">
-        <p14:creationId xmlns:p14="http://schemas.microsoft.com/office/powerpoint/2010/main" val="1513324648"/>
+        <p14:creationId xmlns:p14="http://schemas.microsoft.com/office/powerpoint/2010/main" val="1353284765"/>
       </p:ext>
     </p:extLst>
   </p:cSld>
@@ -2427,7 +2427,7 @@
           <p:cNvPr id="14" name="">
             <a:extLst xmlns:a="http://schemas.openxmlformats.org/drawingml/2006/main">
               <a:ext uri="{FF2B5EF4-FFF2-40B4-BE49-F238E27FC236}">
-                <a16:creationId xmlns:a16="http://schemas.microsoft.com/office/drawing/2014/main" id="{7DD3283F-A83A-4E29-865E-538EE0DB8EC5}"/>
+                <a16:creationId xmlns:a16="http://schemas.microsoft.com/office/drawing/2014/main" id="{0A73FDCB-4404-4E08-BF4C-06256A148CBC}"/>
               </a:ext>
             </a:extLst>
           </p:cNvPr>
@@ -2459,7 +2459,7 @@
           <p:cNvPr id="2" name="">
             <a:extLst xmlns:a="http://schemas.openxmlformats.org/drawingml/2006/main">
               <a:ext uri="{FF2B5EF4-FFF2-40B4-BE49-F238E27FC236}">
-                <a16:creationId xmlns:a16="http://schemas.microsoft.com/office/drawing/2014/main" id="{46665A08-CD03-4EC6-B2F1-DD5B72DF0AB0}"/>
+                <a16:creationId xmlns:a16="http://schemas.microsoft.com/office/drawing/2014/main" id="{91FFC78A-0529-4360-8653-9372BCD2F7E5}"/>
               </a:ext>
             </a:extLst>
           </p:cNvPr>
@@ -2516,7 +2516,7 @@
           <p:cNvPr id="3" name="">
             <a:extLst xmlns:a="http://schemas.openxmlformats.org/drawingml/2006/main">
               <a:ext uri="{FF2B5EF4-FFF2-40B4-BE49-F238E27FC236}">
-                <a16:creationId xmlns:a16="http://schemas.microsoft.com/office/drawing/2014/main" id="{BD3FDDAD-65DA-45A4-85DD-22622761B511}"/>
+                <a16:creationId xmlns:a16="http://schemas.microsoft.com/office/drawing/2014/main" id="{64F7F599-39D7-489A-85DF-B47BF12FDCD6}"/>
               </a:ext>
             </a:extLst>
           </p:cNvPr>
@@ -2548,7 +2548,7 @@
           <p:cNvPr id="4" name="">
             <a:extLst xmlns:a="http://schemas.openxmlformats.org/drawingml/2006/main">
               <a:ext uri="{FF2B5EF4-FFF2-40B4-BE49-F238E27FC236}">
-                <a16:creationId xmlns:a16="http://schemas.microsoft.com/office/drawing/2014/main" id="{264DAE07-9B85-4EA5-B0BE-A284529B2C34}"/>
+                <a16:creationId xmlns:a16="http://schemas.microsoft.com/office/drawing/2014/main" id="{58C51389-C262-44B0-A97E-21BE5418DB8E}"/>
               </a:ext>
             </a:extLst>
           </p:cNvPr>
@@ -2605,7 +2605,7 @@
           <p:cNvPr id="5" name="">
             <a:extLst xmlns:a="http://schemas.openxmlformats.org/drawingml/2006/main">
               <a:ext uri="{FF2B5EF4-FFF2-40B4-BE49-F238E27FC236}">
-                <a16:creationId xmlns:a16="http://schemas.microsoft.com/office/drawing/2014/main" id="{2E646E45-C7A6-4632-B435-288D092DE20B}"/>
+                <a16:creationId xmlns:a16="http://schemas.microsoft.com/office/drawing/2014/main" id="{CBE30213-EA3A-44F2-9F3A-8F750BE65DCA}"/>
               </a:ext>
             </a:extLst>
           </p:cNvPr>
@@ -2662,7 +2662,7 @@
           <p:cNvPr id="6" name="">
             <a:extLst xmlns:a="http://schemas.openxmlformats.org/drawingml/2006/main">
               <a:ext uri="{FF2B5EF4-FFF2-40B4-BE49-F238E27FC236}">
-                <a16:creationId xmlns:a16="http://schemas.microsoft.com/office/drawing/2014/main" id="{D684323A-6E6B-41BB-A2D6-B2543C5DA58F}"/>
+                <a16:creationId xmlns:a16="http://schemas.microsoft.com/office/drawing/2014/main" id="{C264DBF8-1C75-4159-BB03-440AA47A1017}"/>
               </a:ext>
             </a:extLst>
           </p:cNvPr>
@@ -2719,7 +2719,7 @@
           <p:cNvPr id="7" name="">
             <a:extLst xmlns:a="http://schemas.openxmlformats.org/drawingml/2006/main">
               <a:ext uri="{FF2B5EF4-FFF2-40B4-BE49-F238E27FC236}">
-                <a16:creationId xmlns:a16="http://schemas.microsoft.com/office/drawing/2014/main" id="{9A936119-DB97-486F-8332-38DC8097042C}"/>
+                <a16:creationId xmlns:a16="http://schemas.microsoft.com/office/drawing/2014/main" id="{B6DC4B8C-4F98-489E-BF38-513C483D9B83}"/>
               </a:ext>
             </a:extLst>
           </p:cNvPr>
@@ -2751,7 +2751,7 @@
           <p:cNvPr id="8" name="">
             <a:extLst xmlns:a="http://schemas.openxmlformats.org/drawingml/2006/main">
               <a:ext uri="{FF2B5EF4-FFF2-40B4-BE49-F238E27FC236}">
-                <a16:creationId xmlns:a16="http://schemas.microsoft.com/office/drawing/2014/main" id="{37FD2955-B65B-4B7E-914E-BEEE60E6EB03}"/>
+                <a16:creationId xmlns:a16="http://schemas.microsoft.com/office/drawing/2014/main" id="{0BC49BCA-141E-4F37-BFBB-2410F51FD210}"/>
               </a:ext>
             </a:extLst>
           </p:cNvPr>
@@ -2808,7 +2808,7 @@
           <p:cNvPr id="9" name="">
             <a:extLst xmlns:a="http://schemas.openxmlformats.org/drawingml/2006/main">
               <a:ext uri="{FF2B5EF4-FFF2-40B4-BE49-F238E27FC236}">
-                <a16:creationId xmlns:a16="http://schemas.microsoft.com/office/drawing/2014/main" id="{248C4BF9-997B-4490-ABB8-91F5157EBEA6}"/>
+                <a16:creationId xmlns:a16="http://schemas.microsoft.com/office/drawing/2014/main" id="{B23E1926-FB6E-4C5E-A55D-22D4BF8EF040}"/>
               </a:ext>
             </a:extLst>
           </p:cNvPr>
@@ -2865,7 +2865,7 @@
           <p:cNvPr id="10" name="">
             <a:extLst xmlns:a="http://schemas.openxmlformats.org/drawingml/2006/main">
               <a:ext uri="{FF2B5EF4-FFF2-40B4-BE49-F238E27FC236}">
-                <a16:creationId xmlns:a16="http://schemas.microsoft.com/office/drawing/2014/main" id="{47166914-F2EF-4CA1-9C3E-7EE55A4F1AC2}"/>
+                <a16:creationId xmlns:a16="http://schemas.microsoft.com/office/drawing/2014/main" id="{259255C9-9ACF-44A6-9AF0-1A3F4F2513FE}"/>
               </a:ext>
             </a:extLst>
           </p:cNvPr>
@@ -2922,7 +2922,7 @@
           <p:cNvPr id="11" name="">
             <a:extLst xmlns:a="http://schemas.openxmlformats.org/drawingml/2006/main">
               <a:ext uri="{FF2B5EF4-FFF2-40B4-BE49-F238E27FC236}">
-                <a16:creationId xmlns:a16="http://schemas.microsoft.com/office/drawing/2014/main" id="{C8FCC229-DBF1-442A-91E8-0BB1F49FAAB1}"/>
+                <a16:creationId xmlns:a16="http://schemas.microsoft.com/office/drawing/2014/main" id="{6EA17A44-C81F-40DA-883C-21A57CF01362}"/>
               </a:ext>
             </a:extLst>
           </p:cNvPr>
@@ -2979,7 +2979,7 @@
           <p:cNvPr id="12" name="">
             <a:extLst xmlns:a="http://schemas.openxmlformats.org/drawingml/2006/main">
               <a:ext uri="{FF2B5EF4-FFF2-40B4-BE49-F238E27FC236}">
-                <a16:creationId xmlns:a16="http://schemas.microsoft.com/office/drawing/2014/main" id="{9FF9BE30-90FB-466A-B463-23D673BEA373}"/>
+                <a16:creationId xmlns:a16="http://schemas.microsoft.com/office/drawing/2014/main" id="{6D390EBC-A61B-4F50-A4ED-D1DCD27B070E}"/>
               </a:ext>
             </a:extLst>
           </p:cNvPr>
@@ -3036,7 +3036,7 @@
           <p:cNvPr id="13" name="">
             <a:extLst xmlns:a="http://schemas.openxmlformats.org/drawingml/2006/main">
               <a:ext uri="{FF2B5EF4-FFF2-40B4-BE49-F238E27FC236}">
-                <a16:creationId xmlns:a16="http://schemas.microsoft.com/office/drawing/2014/main" id="{E34393F9-82B5-4504-86E9-A78FCA3791D7}"/>
+                <a16:creationId xmlns:a16="http://schemas.microsoft.com/office/drawing/2014/main" id="{41C0A39D-33A5-49B3-BDC7-2642B1B28631}"/>
               </a:ext>
             </a:extLst>
           </p:cNvPr>
@@ -3091,7 +3091,7 @@
     </p:spTree>
     <p:extLst>
       <p:ext uri="{BB962C8B-B14F-4D97-AF65-F5344CB8AC3E}">
-        <p14:creationId xmlns:p14="http://schemas.microsoft.com/office/powerpoint/2010/main" val="1997627465"/>
+        <p14:creationId xmlns:p14="http://schemas.microsoft.com/office/powerpoint/2010/main" val="1291238967"/>
       </p:ext>
     </p:extLst>
   </p:cSld>
@@ -3292,7 +3292,7 @@
           <p:cNvPr id="19" name="">
             <a:extLst xmlns:a="http://schemas.openxmlformats.org/drawingml/2006/main">
               <a:ext uri="{FF2B5EF4-FFF2-40B4-BE49-F238E27FC236}">
-                <a16:creationId xmlns:a16="http://schemas.microsoft.com/office/drawing/2014/main" id="{89FAA745-8CA1-40A8-865C-F8CCD548721B}"/>
+                <a16:creationId xmlns:a16="http://schemas.microsoft.com/office/drawing/2014/main" id="{3667FDF5-E4DB-457F-A854-476E9D976415}"/>
               </a:ext>
             </a:extLst>
           </p:cNvPr>
@@ -3324,7 +3324,7 @@
           <p:cNvPr id="2" name="">
             <a:extLst xmlns:a="http://schemas.openxmlformats.org/drawingml/2006/main">
               <a:ext uri="{FF2B5EF4-FFF2-40B4-BE49-F238E27FC236}">
-                <a16:creationId xmlns:a16="http://schemas.microsoft.com/office/drawing/2014/main" id="{F485B70F-311E-4F4F-9B2C-B23B552092E2}"/>
+                <a16:creationId xmlns:a16="http://schemas.microsoft.com/office/drawing/2014/main" id="{4809EFE8-52BF-41AE-9AA6-CC3269FE8B14}"/>
               </a:ext>
             </a:extLst>
           </p:cNvPr>
@@ -3381,7 +3381,7 @@
           <p:cNvPr id="3" name="">
             <a:extLst xmlns:a="http://schemas.openxmlformats.org/drawingml/2006/main">
               <a:ext uri="{FF2B5EF4-FFF2-40B4-BE49-F238E27FC236}">
-                <a16:creationId xmlns:a16="http://schemas.microsoft.com/office/drawing/2014/main" id="{B63FEB12-8C55-43B6-B9DC-A3ABC0F44CF3}"/>
+                <a16:creationId xmlns:a16="http://schemas.microsoft.com/office/drawing/2014/main" id="{438B1F77-8917-482C-8D16-38658DCE7952}"/>
               </a:ext>
             </a:extLst>
           </p:cNvPr>
@@ -3413,7 +3413,7 @@
           <p:cNvPr id="4" name="">
             <a:extLst xmlns:a="http://schemas.openxmlformats.org/drawingml/2006/main">
               <a:ext uri="{FF2B5EF4-FFF2-40B4-BE49-F238E27FC236}">
-                <a16:creationId xmlns:a16="http://schemas.microsoft.com/office/drawing/2014/main" id="{6F727D26-8D63-4AC4-AC16-27FED96AAAB0}"/>
+                <a16:creationId xmlns:a16="http://schemas.microsoft.com/office/drawing/2014/main" id="{B1099C54-1AE3-47C4-BC86-E4E5D127EC08}"/>
               </a:ext>
             </a:extLst>
           </p:cNvPr>
@@ -3470,7 +3470,7 @@
           <p:cNvPr id="5" name="">
             <a:extLst xmlns:a="http://schemas.openxmlformats.org/drawingml/2006/main">
               <a:ext uri="{FF2B5EF4-FFF2-40B4-BE49-F238E27FC236}">
-                <a16:creationId xmlns:a16="http://schemas.microsoft.com/office/drawing/2014/main" id="{53F57CA9-768D-439E-95FA-CBEC5FC2F553}"/>
+                <a16:creationId xmlns:a16="http://schemas.microsoft.com/office/drawing/2014/main" id="{CDBCE2DA-EC5E-4069-9D8F-CEEECA632883}"/>
               </a:ext>
             </a:extLst>
           </p:cNvPr>
@@ -3527,7 +3527,7 @@
           <p:cNvPr id="6" name="">
             <a:extLst xmlns:a="http://schemas.openxmlformats.org/drawingml/2006/main">
               <a:ext uri="{FF2B5EF4-FFF2-40B4-BE49-F238E27FC236}">
-                <a16:creationId xmlns:a16="http://schemas.microsoft.com/office/drawing/2014/main" id="{1652793E-1C08-495D-A5FB-B502412818DE}"/>
+                <a16:creationId xmlns:a16="http://schemas.microsoft.com/office/drawing/2014/main" id="{2000308D-02E4-4BE1-822D-945F4F6E574F}"/>
               </a:ext>
             </a:extLst>
           </p:cNvPr>
@@ -3584,7 +3584,7 @@
           <p:cNvPr id="7" name="">
             <a:extLst xmlns:a="http://schemas.openxmlformats.org/drawingml/2006/main">
               <a:ext uri="{FF2B5EF4-FFF2-40B4-BE49-F238E27FC236}">
-                <a16:creationId xmlns:a16="http://schemas.microsoft.com/office/drawing/2014/main" id="{0B2115F6-D363-4AA6-8AEC-B9715E703A19}"/>
+                <a16:creationId xmlns:a16="http://schemas.microsoft.com/office/drawing/2014/main" id="{6D5CF65E-0843-4838-BD55-E4917E8BD015}"/>
               </a:ext>
             </a:extLst>
           </p:cNvPr>
@@ -3616,7 +3616,7 @@
           <p:cNvPr id="8" name="">
             <a:extLst xmlns:a="http://schemas.openxmlformats.org/drawingml/2006/main">
               <a:ext uri="{FF2B5EF4-FFF2-40B4-BE49-F238E27FC236}">
-                <a16:creationId xmlns:a16="http://schemas.microsoft.com/office/drawing/2014/main" id="{180F61B6-B202-4D09-BD2B-988E09C84E34}"/>
+                <a16:creationId xmlns:a16="http://schemas.microsoft.com/office/drawing/2014/main" id="{DA600D10-4761-467E-8EFB-B1082D48B7A1}"/>
               </a:ext>
             </a:extLst>
           </p:cNvPr>
@@ -3673,7 +3673,7 @@
           <p:cNvPr id="9" name="">
             <a:extLst xmlns:a="http://schemas.openxmlformats.org/drawingml/2006/main">
               <a:ext uri="{FF2B5EF4-FFF2-40B4-BE49-F238E27FC236}">
-                <a16:creationId xmlns:a16="http://schemas.microsoft.com/office/drawing/2014/main" id="{1D3D7D78-D3DC-432C-8761-DD49D8AB026A}"/>
+                <a16:creationId xmlns:a16="http://schemas.microsoft.com/office/drawing/2014/main" id="{5CD34453-79E5-49D0-82D3-F0B832012963}"/>
               </a:ext>
             </a:extLst>
           </p:cNvPr>
@@ -3730,7 +3730,7 @@
           <p:cNvPr id="10" name="">
             <a:extLst xmlns:a="http://schemas.openxmlformats.org/drawingml/2006/main">
               <a:ext uri="{FF2B5EF4-FFF2-40B4-BE49-F238E27FC236}">
-                <a16:creationId xmlns:a16="http://schemas.microsoft.com/office/drawing/2014/main" id="{B331D2E9-333E-4B2F-A1F7-933AE464F0D2}"/>
+                <a16:creationId xmlns:a16="http://schemas.microsoft.com/office/drawing/2014/main" id="{290BA44A-7873-4B24-BF40-080C4A82F64B}"/>
               </a:ext>
             </a:extLst>
           </p:cNvPr>
@@ -3787,7 +3787,7 @@
           <p:cNvPr id="11" name="">
             <a:extLst xmlns:a="http://schemas.openxmlformats.org/drawingml/2006/main">
               <a:ext uri="{FF2B5EF4-FFF2-40B4-BE49-F238E27FC236}">
-                <a16:creationId xmlns:a16="http://schemas.microsoft.com/office/drawing/2014/main" id="{2A47159B-4CD4-48E3-A2C8-E543BCADD81E}"/>
+                <a16:creationId xmlns:a16="http://schemas.microsoft.com/office/drawing/2014/main" id="{C7D64C94-09E0-4774-AB42-C012D59BACD1}"/>
               </a:ext>
             </a:extLst>
           </p:cNvPr>
@@ -3821,7 +3821,7 @@
           <p:cNvPr id="12" name="">
             <a:extLst xmlns:a="http://schemas.openxmlformats.org/drawingml/2006/main">
               <a:ext uri="{FF2B5EF4-FFF2-40B4-BE49-F238E27FC236}">
-                <a16:creationId xmlns:a16="http://schemas.microsoft.com/office/drawing/2014/main" id="{E6818675-CEE5-45FC-98E0-349460936541}"/>
+                <a16:creationId xmlns:a16="http://schemas.microsoft.com/office/drawing/2014/main" id="{25A75738-10D2-4C5F-8B8D-A120D3AB5E7C}"/>
               </a:ext>
             </a:extLst>
           </p:cNvPr>
@@ -3878,7 +3878,7 @@
           <p:cNvPr id="13" name="">
             <a:extLst xmlns:a="http://schemas.openxmlformats.org/drawingml/2006/main">
               <a:ext uri="{FF2B5EF4-FFF2-40B4-BE49-F238E27FC236}">
-                <a16:creationId xmlns:a16="http://schemas.microsoft.com/office/drawing/2014/main" id="{D394465E-C982-4630-B842-B2EB6141EC6A}"/>
+                <a16:creationId xmlns:a16="http://schemas.microsoft.com/office/drawing/2014/main" id="{52EC6C5B-1071-413D-AB31-F068523BD82F}"/>
               </a:ext>
             </a:extLst>
           </p:cNvPr>
@@ -3935,7 +3935,7 @@
           <p:cNvPr id="14" name="">
             <a:extLst xmlns:a="http://schemas.openxmlformats.org/drawingml/2006/main">
               <a:ext uri="{FF2B5EF4-FFF2-40B4-BE49-F238E27FC236}">
-                <a16:creationId xmlns:a16="http://schemas.microsoft.com/office/drawing/2014/main" id="{4E15156F-4DBF-4428-B0D1-45BBF3C37BEA}"/>
+                <a16:creationId xmlns:a16="http://schemas.microsoft.com/office/drawing/2014/main" id="{6FD1C521-F6A8-4963-B586-3BAD6FDA8103}"/>
               </a:ext>
             </a:extLst>
           </p:cNvPr>
@@ -3992,7 +3992,7 @@
           <p:cNvPr id="15" name="">
             <a:extLst xmlns:a="http://schemas.openxmlformats.org/drawingml/2006/main">
               <a:ext uri="{FF2B5EF4-FFF2-40B4-BE49-F238E27FC236}">
-                <a16:creationId xmlns:a16="http://schemas.microsoft.com/office/drawing/2014/main" id="{55690B65-0169-4C50-8E37-E07071B3974F}"/>
+                <a16:creationId xmlns:a16="http://schemas.microsoft.com/office/drawing/2014/main" id="{8336FF28-4B6D-41D2-A60C-8A4E02F10C7D}"/>
               </a:ext>
             </a:extLst>
           </p:cNvPr>
@@ -4026,7 +4026,7 @@
           <p:cNvPr id="16" name="">
             <a:extLst xmlns:a="http://schemas.openxmlformats.org/drawingml/2006/main">
               <a:ext uri="{FF2B5EF4-FFF2-40B4-BE49-F238E27FC236}">
-                <a16:creationId xmlns:a16="http://schemas.microsoft.com/office/drawing/2014/main" id="{9241793F-BB28-46DB-A12A-4F05EA41204A}"/>
+                <a16:creationId xmlns:a16="http://schemas.microsoft.com/office/drawing/2014/main" id="{5D6E0AB2-D75F-4F48-83E7-11E05063674E}"/>
               </a:ext>
             </a:extLst>
           </p:cNvPr>
@@ -4083,7 +4083,7 @@
           <p:cNvPr id="17" name="">
             <a:extLst xmlns:a="http://schemas.openxmlformats.org/drawingml/2006/main">
               <a:ext uri="{FF2B5EF4-FFF2-40B4-BE49-F238E27FC236}">
-                <a16:creationId xmlns:a16="http://schemas.microsoft.com/office/drawing/2014/main" id="{14ED977A-1552-49FE-9D96-14AB77066A6C}"/>
+                <a16:creationId xmlns:a16="http://schemas.microsoft.com/office/drawing/2014/main" id="{ADB58DB7-920E-4C9F-A6C0-BEECD09F2F83}"/>
               </a:ext>
             </a:extLst>
           </p:cNvPr>
@@ -4140,7 +4140,7 @@
           <p:cNvPr id="18" name="">
             <a:extLst xmlns:a="http://schemas.openxmlformats.org/drawingml/2006/main">
               <a:ext uri="{FF2B5EF4-FFF2-40B4-BE49-F238E27FC236}">
-                <a16:creationId xmlns:a16="http://schemas.microsoft.com/office/drawing/2014/main" id="{E9D603CB-454F-45DA-946B-50237B3AA2FB}"/>
+                <a16:creationId xmlns:a16="http://schemas.microsoft.com/office/drawing/2014/main" id="{AADC8EC5-7C1D-446E-91E9-12D46213BF14}"/>
               </a:ext>
             </a:extLst>
           </p:cNvPr>
@@ -4195,7 +4195,7 @@
     </p:spTree>
     <p:extLst>
       <p:ext uri="{BB962C8B-B14F-4D97-AF65-F5344CB8AC3E}">
-        <p14:creationId xmlns:p14="http://schemas.microsoft.com/office/powerpoint/2010/main" val="1518903355"/>
+        <p14:creationId xmlns:p14="http://schemas.microsoft.com/office/powerpoint/2010/main" val="1443825418"/>
       </p:ext>
     </p:extLst>
   </p:cSld>
@@ -4350,7 +4350,7 @@
           <p:cNvPr id="23" name="">
             <a:extLst xmlns:a="http://schemas.openxmlformats.org/drawingml/2006/main">
               <a:ext uri="{FF2B5EF4-FFF2-40B4-BE49-F238E27FC236}">
-                <a16:creationId xmlns:a16="http://schemas.microsoft.com/office/drawing/2014/main" id="{4C32E210-BB06-420A-AFEE-9931332FE82B}"/>
+                <a16:creationId xmlns:a16="http://schemas.microsoft.com/office/drawing/2014/main" id="{CB36C754-2CA4-45D4-B63E-F465F964ABA8}"/>
               </a:ext>
             </a:extLst>
           </p:cNvPr>
@@ -4382,7 +4382,7 @@
           <p:cNvPr id="2" name="">
             <a:extLst xmlns:a="http://schemas.openxmlformats.org/drawingml/2006/main">
               <a:ext uri="{FF2B5EF4-FFF2-40B4-BE49-F238E27FC236}">
-                <a16:creationId xmlns:a16="http://schemas.microsoft.com/office/drawing/2014/main" id="{ECD4A2FB-C232-48EB-BE64-D5F12A7B20C0}"/>
+                <a16:creationId xmlns:a16="http://schemas.microsoft.com/office/drawing/2014/main" id="{8CADFAB8-35B1-4931-AE92-AF3CA0A2663C}"/>
               </a:ext>
             </a:extLst>
           </p:cNvPr>
@@ -4439,7 +4439,7 @@
           <p:cNvPr id="3" name="">
             <a:extLst xmlns:a="http://schemas.openxmlformats.org/drawingml/2006/main">
               <a:ext uri="{FF2B5EF4-FFF2-40B4-BE49-F238E27FC236}">
-                <a16:creationId xmlns:a16="http://schemas.microsoft.com/office/drawing/2014/main" id="{37F31434-FE70-4661-A5C0-749F0822FD27}"/>
+                <a16:creationId xmlns:a16="http://schemas.microsoft.com/office/drawing/2014/main" id="{F71165BC-75A1-4DE3-8F5B-3A4D2D0E4CA0}"/>
               </a:ext>
             </a:extLst>
           </p:cNvPr>
@@ -4471,7 +4471,7 @@
           <p:cNvPr id="4" name="">
             <a:extLst xmlns:a="http://schemas.openxmlformats.org/drawingml/2006/main">
               <a:ext uri="{FF2B5EF4-FFF2-40B4-BE49-F238E27FC236}">
-                <a16:creationId xmlns:a16="http://schemas.microsoft.com/office/drawing/2014/main" id="{AB7398F3-6441-432A-BE80-05B1DA0D798E}"/>
+                <a16:creationId xmlns:a16="http://schemas.microsoft.com/office/drawing/2014/main" id="{EF749C69-6FA3-498C-AA30-92F16024D4ED}"/>
               </a:ext>
             </a:extLst>
           </p:cNvPr>
@@ -4528,7 +4528,7 @@
           <p:cNvPr id="5" name="">
             <a:extLst xmlns:a="http://schemas.openxmlformats.org/drawingml/2006/main">
               <a:ext uri="{FF2B5EF4-FFF2-40B4-BE49-F238E27FC236}">
-                <a16:creationId xmlns:a16="http://schemas.microsoft.com/office/drawing/2014/main" id="{1C16C057-70AB-4711-8527-CA82DD25DA5D}"/>
+                <a16:creationId xmlns:a16="http://schemas.microsoft.com/office/drawing/2014/main" id="{5B27D51A-0E7F-4C17-802F-663171DBD05B}"/>
               </a:ext>
             </a:extLst>
           </p:cNvPr>
@@ -4585,7 +4585,7 @@
           <p:cNvPr id="6" name="">
             <a:extLst xmlns:a="http://schemas.openxmlformats.org/drawingml/2006/main">
               <a:ext uri="{FF2B5EF4-FFF2-40B4-BE49-F238E27FC236}">
-                <a16:creationId xmlns:a16="http://schemas.microsoft.com/office/drawing/2014/main" id="{8E22891E-4563-4594-A513-B30216A60631}"/>
+                <a16:creationId xmlns:a16="http://schemas.microsoft.com/office/drawing/2014/main" id="{1553E54C-AEBC-400E-92A1-27F6271D827D}"/>
               </a:ext>
             </a:extLst>
           </p:cNvPr>
@@ -4642,7 +4642,7 @@
           <p:cNvPr id="7" name="">
             <a:extLst xmlns:a="http://schemas.openxmlformats.org/drawingml/2006/main">
               <a:ext uri="{FF2B5EF4-FFF2-40B4-BE49-F238E27FC236}">
-                <a16:creationId xmlns:a16="http://schemas.microsoft.com/office/drawing/2014/main" id="{3899377E-6DAA-45E7-BF22-F91F669B7113}"/>
+                <a16:creationId xmlns:a16="http://schemas.microsoft.com/office/drawing/2014/main" id="{7CCD46B6-E532-4044-ACDA-9F002E6CC339}"/>
               </a:ext>
             </a:extLst>
           </p:cNvPr>
@@ -4674,7 +4674,7 @@
           <p:cNvPr id="8" name="">
             <a:extLst xmlns:a="http://schemas.openxmlformats.org/drawingml/2006/main">
               <a:ext uri="{FF2B5EF4-FFF2-40B4-BE49-F238E27FC236}">
-                <a16:creationId xmlns:a16="http://schemas.microsoft.com/office/drawing/2014/main" id="{BC92DC4B-8570-49FA-B4F8-8761A8199A28}"/>
+                <a16:creationId xmlns:a16="http://schemas.microsoft.com/office/drawing/2014/main" id="{FD602B76-AEA4-496E-90F1-DF1B0B4F1448}"/>
               </a:ext>
             </a:extLst>
           </p:cNvPr>
@@ -4731,7 +4731,7 @@
           <p:cNvPr id="9" name="">
             <a:extLst xmlns:a="http://schemas.openxmlformats.org/drawingml/2006/main">
               <a:ext uri="{FF2B5EF4-FFF2-40B4-BE49-F238E27FC236}">
-                <a16:creationId xmlns:a16="http://schemas.microsoft.com/office/drawing/2014/main" id="{F45C3D05-8F04-48A3-992C-38FEEAB6E808}"/>
+                <a16:creationId xmlns:a16="http://schemas.microsoft.com/office/drawing/2014/main" id="{59336288-70C8-4F49-A38A-E100028798D9}"/>
               </a:ext>
             </a:extLst>
           </p:cNvPr>
@@ -4788,7 +4788,7 @@
           <p:cNvPr id="10" name="">
             <a:extLst xmlns:a="http://schemas.openxmlformats.org/drawingml/2006/main">
               <a:ext uri="{FF2B5EF4-FFF2-40B4-BE49-F238E27FC236}">
-                <a16:creationId xmlns:a16="http://schemas.microsoft.com/office/drawing/2014/main" id="{7EF3FFC1-CE63-4EF7-B018-159DB9127B21}"/>
+                <a16:creationId xmlns:a16="http://schemas.microsoft.com/office/drawing/2014/main" id="{C3DFF2AC-36CD-4DA0-B4BD-DDDB6BECE2AF}"/>
               </a:ext>
             </a:extLst>
           </p:cNvPr>
@@ -4822,7 +4822,7 @@
           <p:cNvPr id="11" name="">
             <a:extLst xmlns:a="http://schemas.openxmlformats.org/drawingml/2006/main">
               <a:ext uri="{FF2B5EF4-FFF2-40B4-BE49-F238E27FC236}">
-                <a16:creationId xmlns:a16="http://schemas.microsoft.com/office/drawing/2014/main" id="{563D2636-9209-40CD-935B-9FF42A0C1B30}"/>
+                <a16:creationId xmlns:a16="http://schemas.microsoft.com/office/drawing/2014/main" id="{AFF44F49-66A8-40DA-BA87-60C573E9554F}"/>
               </a:ext>
             </a:extLst>
           </p:cNvPr>
@@ -4854,7 +4854,7 @@
           <p:cNvPr id="12" name="">
             <a:extLst xmlns:a="http://schemas.openxmlformats.org/drawingml/2006/main">
               <a:ext uri="{FF2B5EF4-FFF2-40B4-BE49-F238E27FC236}">
-                <a16:creationId xmlns:a16="http://schemas.microsoft.com/office/drawing/2014/main" id="{ACEE23DB-BD4B-42FB-96ED-22AEA22090C0}"/>
+                <a16:creationId xmlns:a16="http://schemas.microsoft.com/office/drawing/2014/main" id="{B22617FE-BC60-4F87-816D-E47711D14A05}"/>
               </a:ext>
             </a:extLst>
           </p:cNvPr>
@@ -4911,7 +4911,7 @@
           <p:cNvPr id="13" name="">
             <a:extLst xmlns:a="http://schemas.openxmlformats.org/drawingml/2006/main">
               <a:ext uri="{FF2B5EF4-FFF2-40B4-BE49-F238E27FC236}">
-                <a16:creationId xmlns:a16="http://schemas.microsoft.com/office/drawing/2014/main" id="{00A9BF8F-5ABC-40D0-9943-3C5F6491B114}"/>
+                <a16:creationId xmlns:a16="http://schemas.microsoft.com/office/drawing/2014/main" id="{DA142AD6-D5D0-4693-8BCA-044C0F73FB30}"/>
               </a:ext>
             </a:extLst>
           </p:cNvPr>
@@ -4968,7 +4968,7 @@
           <p:cNvPr id="14" name="">
             <a:extLst xmlns:a="http://schemas.openxmlformats.org/drawingml/2006/main">
               <a:ext uri="{FF2B5EF4-FFF2-40B4-BE49-F238E27FC236}">
-                <a16:creationId xmlns:a16="http://schemas.microsoft.com/office/drawing/2014/main" id="{B050099E-3E30-4E1E-86CF-FB60E05608D3}"/>
+                <a16:creationId xmlns:a16="http://schemas.microsoft.com/office/drawing/2014/main" id="{8724A72F-5CF9-4351-8B75-11CA6DD139C1}"/>
               </a:ext>
             </a:extLst>
           </p:cNvPr>
@@ -5002,7 +5002,7 @@
           <p:cNvPr id="15" name="">
             <a:extLst xmlns:a="http://schemas.openxmlformats.org/drawingml/2006/main">
               <a:ext uri="{FF2B5EF4-FFF2-40B4-BE49-F238E27FC236}">
-                <a16:creationId xmlns:a16="http://schemas.microsoft.com/office/drawing/2014/main" id="{938A5BD3-00FA-40AE-9D0D-D5DD17D2F742}"/>
+                <a16:creationId xmlns:a16="http://schemas.microsoft.com/office/drawing/2014/main" id="{D81AD31A-5D54-4122-BF30-3F1AEF636E27}"/>
               </a:ext>
             </a:extLst>
           </p:cNvPr>
@@ -5034,7 +5034,7 @@
           <p:cNvPr id="16" name="">
             <a:extLst xmlns:a="http://schemas.openxmlformats.org/drawingml/2006/main">
               <a:ext uri="{FF2B5EF4-FFF2-40B4-BE49-F238E27FC236}">
-                <a16:creationId xmlns:a16="http://schemas.microsoft.com/office/drawing/2014/main" id="{5F7D98FF-0189-4D76-8727-BFEADCDD7E84}"/>
+                <a16:creationId xmlns:a16="http://schemas.microsoft.com/office/drawing/2014/main" id="{C73C9BAA-22E5-4A7E-B415-4BA02E1916EC}"/>
               </a:ext>
             </a:extLst>
           </p:cNvPr>
@@ -5091,7 +5091,7 @@
           <p:cNvPr id="17" name="">
             <a:extLst xmlns:a="http://schemas.openxmlformats.org/drawingml/2006/main">
               <a:ext uri="{FF2B5EF4-FFF2-40B4-BE49-F238E27FC236}">
-                <a16:creationId xmlns:a16="http://schemas.microsoft.com/office/drawing/2014/main" id="{C5F957AA-4828-4236-95EE-B434EE5F2DF3}"/>
+                <a16:creationId xmlns:a16="http://schemas.microsoft.com/office/drawing/2014/main" id="{7AFE56E9-87C1-440B-AF00-94F7255B5E3F}"/>
               </a:ext>
             </a:extLst>
           </p:cNvPr>
@@ -5148,7 +5148,7 @@
           <p:cNvPr id="18" name="">
             <a:extLst xmlns:a="http://schemas.openxmlformats.org/drawingml/2006/main">
               <a:ext uri="{FF2B5EF4-FFF2-40B4-BE49-F238E27FC236}">
-                <a16:creationId xmlns:a16="http://schemas.microsoft.com/office/drawing/2014/main" id="{1691C30E-AE72-46B0-B020-BD8B58716273}"/>
+                <a16:creationId xmlns:a16="http://schemas.microsoft.com/office/drawing/2014/main" id="{0C9E064E-951B-4284-B2F8-8ECFE6D76429}"/>
               </a:ext>
             </a:extLst>
           </p:cNvPr>
@@ -5182,7 +5182,7 @@
           <p:cNvPr id="19" name="">
             <a:extLst xmlns:a="http://schemas.openxmlformats.org/drawingml/2006/main">
               <a:ext uri="{FF2B5EF4-FFF2-40B4-BE49-F238E27FC236}">
-                <a16:creationId xmlns:a16="http://schemas.microsoft.com/office/drawing/2014/main" id="{95AAE749-CD66-4B77-AB8A-70A47D095AF1}"/>
+                <a16:creationId xmlns:a16="http://schemas.microsoft.com/office/drawing/2014/main" id="{9BC6D20C-367E-4F0B-8E0A-FF8B308F7FA0}"/>
               </a:ext>
             </a:extLst>
           </p:cNvPr>
@@ -5214,7 +5214,7 @@
           <p:cNvPr id="20" name="">
             <a:extLst xmlns:a="http://schemas.openxmlformats.org/drawingml/2006/main">
               <a:ext uri="{FF2B5EF4-FFF2-40B4-BE49-F238E27FC236}">
-                <a16:creationId xmlns:a16="http://schemas.microsoft.com/office/drawing/2014/main" id="{B1308B17-F070-4477-BC27-DAC8B105F54F}"/>
+                <a16:creationId xmlns:a16="http://schemas.microsoft.com/office/drawing/2014/main" id="{85B4EF11-C729-4098-A216-5A025EE80D87}"/>
               </a:ext>
             </a:extLst>
           </p:cNvPr>
@@ -5271,7 +5271,7 @@
           <p:cNvPr id="21" name="">
             <a:extLst xmlns:a="http://schemas.openxmlformats.org/drawingml/2006/main">
               <a:ext uri="{FF2B5EF4-FFF2-40B4-BE49-F238E27FC236}">
-                <a16:creationId xmlns:a16="http://schemas.microsoft.com/office/drawing/2014/main" id="{07FC66B0-8646-462E-B042-085C230EE5DF}"/>
+                <a16:creationId xmlns:a16="http://schemas.microsoft.com/office/drawing/2014/main" id="{2E84EDE0-1DD8-41FF-985A-8D7B93948904}"/>
               </a:ext>
             </a:extLst>
           </p:cNvPr>
@@ -5328,7 +5328,7 @@
           <p:cNvPr id="22" name="">
             <a:extLst xmlns:a="http://schemas.openxmlformats.org/drawingml/2006/main">
               <a:ext uri="{FF2B5EF4-FFF2-40B4-BE49-F238E27FC236}">
-                <a16:creationId xmlns:a16="http://schemas.microsoft.com/office/drawing/2014/main" id="{6C65D8A0-5921-4BC6-80D3-849064E1AB85}"/>
+                <a16:creationId xmlns:a16="http://schemas.microsoft.com/office/drawing/2014/main" id="{0B30F198-31B6-411B-9CA8-D5B1746A831B}"/>
               </a:ext>
             </a:extLst>
           </p:cNvPr>
@@ -5383,7 +5383,7 @@
     </p:spTree>
     <p:extLst>
       <p:ext uri="{BB962C8B-B14F-4D97-AF65-F5344CB8AC3E}">
-        <p14:creationId xmlns:p14="http://schemas.microsoft.com/office/powerpoint/2010/main" val="1868302468"/>
+        <p14:creationId xmlns:p14="http://schemas.microsoft.com/office/powerpoint/2010/main" val="24204599"/>
       </p:ext>
     </p:extLst>
   </p:cSld>
@@ -5584,7 +5584,7 @@
           <p:cNvPr id="23" name="">
             <a:extLst xmlns:a="http://schemas.openxmlformats.org/drawingml/2006/main">
               <a:ext uri="{FF2B5EF4-FFF2-40B4-BE49-F238E27FC236}">
-                <a16:creationId xmlns:a16="http://schemas.microsoft.com/office/drawing/2014/main" id="{E385B62F-5D0A-4D7B-8B79-16A69CDE0B3D}"/>
+                <a16:creationId xmlns:a16="http://schemas.microsoft.com/office/drawing/2014/main" id="{B5BAE251-C547-489E-876D-BEC9678F976A}"/>
               </a:ext>
             </a:extLst>
           </p:cNvPr>
@@ -5616,7 +5616,7 @@
           <p:cNvPr id="2" name="">
             <a:extLst xmlns:a="http://schemas.openxmlformats.org/drawingml/2006/main">
               <a:ext uri="{FF2B5EF4-FFF2-40B4-BE49-F238E27FC236}">
-                <a16:creationId xmlns:a16="http://schemas.microsoft.com/office/drawing/2014/main" id="{24CCDE0A-B5EF-47C5-B52A-84EB2156CB72}"/>
+                <a16:creationId xmlns:a16="http://schemas.microsoft.com/office/drawing/2014/main" id="{BD43B619-40DB-4ABE-83BB-4D16F7B51DB1}"/>
               </a:ext>
             </a:extLst>
           </p:cNvPr>
@@ -5673,7 +5673,7 @@
           <p:cNvPr id="3" name="">
             <a:extLst xmlns:a="http://schemas.openxmlformats.org/drawingml/2006/main">
               <a:ext uri="{FF2B5EF4-FFF2-40B4-BE49-F238E27FC236}">
-                <a16:creationId xmlns:a16="http://schemas.microsoft.com/office/drawing/2014/main" id="{52B1F6F4-E0F3-40EF-BC20-8D62697983B6}"/>
+                <a16:creationId xmlns:a16="http://schemas.microsoft.com/office/drawing/2014/main" id="{DE85E497-221E-467E-B5A1-F0D779352BBD}"/>
               </a:ext>
             </a:extLst>
           </p:cNvPr>
@@ -5705,7 +5705,7 @@
           <p:cNvPr id="4" name="">
             <a:extLst xmlns:a="http://schemas.openxmlformats.org/drawingml/2006/main">
               <a:ext uri="{FF2B5EF4-FFF2-40B4-BE49-F238E27FC236}">
-                <a16:creationId xmlns:a16="http://schemas.microsoft.com/office/drawing/2014/main" id="{A43101A9-0692-4E82-9FE1-DFADBFC22743}"/>
+                <a16:creationId xmlns:a16="http://schemas.microsoft.com/office/drawing/2014/main" id="{27B783B0-17D6-4581-B8D4-23EA656CAE61}"/>
               </a:ext>
             </a:extLst>
           </p:cNvPr>
@@ -5762,7 +5762,7 @@
           <p:cNvPr id="5" name="">
             <a:extLst xmlns:a="http://schemas.openxmlformats.org/drawingml/2006/main">
               <a:ext uri="{FF2B5EF4-FFF2-40B4-BE49-F238E27FC236}">
-                <a16:creationId xmlns:a16="http://schemas.microsoft.com/office/drawing/2014/main" id="{047BD66F-D725-4536-AD66-3BA89A134A37}"/>
+                <a16:creationId xmlns:a16="http://schemas.microsoft.com/office/drawing/2014/main" id="{E24D6F46-71B3-475D-B558-38FDA24E9C2F}"/>
               </a:ext>
             </a:extLst>
           </p:cNvPr>
@@ -5819,7 +5819,7 @@
           <p:cNvPr id="6" name="">
             <a:extLst xmlns:a="http://schemas.openxmlformats.org/drawingml/2006/main">
               <a:ext uri="{FF2B5EF4-FFF2-40B4-BE49-F238E27FC236}">
-                <a16:creationId xmlns:a16="http://schemas.microsoft.com/office/drawing/2014/main" id="{BA55BB5B-23A4-4CF1-BA0F-456DCA525068}"/>
+                <a16:creationId xmlns:a16="http://schemas.microsoft.com/office/drawing/2014/main" id="{7FBB412C-D94F-4D7D-98D6-CBA704F69753}"/>
               </a:ext>
             </a:extLst>
           </p:cNvPr>
@@ -5876,7 +5876,7 @@
           <p:cNvPr id="7" name="">
             <a:extLst xmlns:a="http://schemas.openxmlformats.org/drawingml/2006/main">
               <a:ext uri="{FF2B5EF4-FFF2-40B4-BE49-F238E27FC236}">
-                <a16:creationId xmlns:a16="http://schemas.microsoft.com/office/drawing/2014/main" id="{4F84267A-80A3-462B-B074-057A9C88389C}"/>
+                <a16:creationId xmlns:a16="http://schemas.microsoft.com/office/drawing/2014/main" id="{A41D16BA-2F16-4EB5-9483-E44A0ABF0301}"/>
               </a:ext>
             </a:extLst>
           </p:cNvPr>
@@ -5908,7 +5908,7 @@
           <p:cNvPr id="8" name="">
             <a:extLst xmlns:a="http://schemas.openxmlformats.org/drawingml/2006/main">
               <a:ext uri="{FF2B5EF4-FFF2-40B4-BE49-F238E27FC236}">
-                <a16:creationId xmlns:a16="http://schemas.microsoft.com/office/drawing/2014/main" id="{85585E6A-1390-49B9-B05C-1F2B2673AE8F}"/>
+                <a16:creationId xmlns:a16="http://schemas.microsoft.com/office/drawing/2014/main" id="{4194F9B4-8D84-43E8-AA04-2291928399F6}"/>
               </a:ext>
             </a:extLst>
           </p:cNvPr>
@@ -5965,7 +5965,7 @@
           <p:cNvPr id="9" name="">
             <a:extLst xmlns:a="http://schemas.openxmlformats.org/drawingml/2006/main">
               <a:ext uri="{FF2B5EF4-FFF2-40B4-BE49-F238E27FC236}">
-                <a16:creationId xmlns:a16="http://schemas.microsoft.com/office/drawing/2014/main" id="{6C0401E8-00DD-4928-97A5-19AC232E68BF}"/>
+                <a16:creationId xmlns:a16="http://schemas.microsoft.com/office/drawing/2014/main" id="{B2944301-BE42-4508-9988-E261B055D01D}"/>
               </a:ext>
             </a:extLst>
           </p:cNvPr>
@@ -6022,7 +6022,7 @@
           <p:cNvPr id="10" name="">
             <a:extLst xmlns:a="http://schemas.openxmlformats.org/drawingml/2006/main">
               <a:ext uri="{FF2B5EF4-FFF2-40B4-BE49-F238E27FC236}">
-                <a16:creationId xmlns:a16="http://schemas.microsoft.com/office/drawing/2014/main" id="{DFCBCCDC-9DDC-4842-B7A9-F21795FCBF5F}"/>
+                <a16:creationId xmlns:a16="http://schemas.microsoft.com/office/drawing/2014/main" id="{16FDCB04-6B02-4E41-8025-F036839861DE}"/>
               </a:ext>
             </a:extLst>
           </p:cNvPr>
@@ -6056,7 +6056,7 @@
           <p:cNvPr id="11" name="">
             <a:extLst xmlns:a="http://schemas.openxmlformats.org/drawingml/2006/main">
               <a:ext uri="{FF2B5EF4-FFF2-40B4-BE49-F238E27FC236}">
-                <a16:creationId xmlns:a16="http://schemas.microsoft.com/office/drawing/2014/main" id="{E4AF5F3C-61F4-4A07-9B1B-68AF9F7A269A}"/>
+                <a16:creationId xmlns:a16="http://schemas.microsoft.com/office/drawing/2014/main" id="{5D8BBF6F-6F12-410D-932F-88786F2617D0}"/>
               </a:ext>
             </a:extLst>
           </p:cNvPr>
@@ -6088,7 +6088,7 @@
           <p:cNvPr id="12" name="">
             <a:extLst xmlns:a="http://schemas.openxmlformats.org/drawingml/2006/main">
               <a:ext uri="{FF2B5EF4-FFF2-40B4-BE49-F238E27FC236}">
-                <a16:creationId xmlns:a16="http://schemas.microsoft.com/office/drawing/2014/main" id="{479B97E5-C79C-43DB-ADDD-40AF66956A93}"/>
+                <a16:creationId xmlns:a16="http://schemas.microsoft.com/office/drawing/2014/main" id="{FBE48F4E-2E71-4D40-B5E7-DE7EFC323B91}"/>
               </a:ext>
             </a:extLst>
           </p:cNvPr>
@@ -6145,7 +6145,7 @@
           <p:cNvPr id="13" name="">
             <a:extLst xmlns:a="http://schemas.openxmlformats.org/drawingml/2006/main">
               <a:ext uri="{FF2B5EF4-FFF2-40B4-BE49-F238E27FC236}">
-                <a16:creationId xmlns:a16="http://schemas.microsoft.com/office/drawing/2014/main" id="{0207F7CF-5557-412D-B1B6-8ACF3EE023AE}"/>
+                <a16:creationId xmlns:a16="http://schemas.microsoft.com/office/drawing/2014/main" id="{20366F72-7A6F-4ED8-ACB0-BF4AF88CC6EC}"/>
               </a:ext>
             </a:extLst>
           </p:cNvPr>
@@ -6202,7 +6202,7 @@
           <p:cNvPr id="14" name="">
             <a:extLst xmlns:a="http://schemas.openxmlformats.org/drawingml/2006/main">
               <a:ext uri="{FF2B5EF4-FFF2-40B4-BE49-F238E27FC236}">
-                <a16:creationId xmlns:a16="http://schemas.microsoft.com/office/drawing/2014/main" id="{7AE3AAD0-2098-424C-952C-1C630F1D4E87}"/>
+                <a16:creationId xmlns:a16="http://schemas.microsoft.com/office/drawing/2014/main" id="{2E2BFC0D-08E7-4D3C-A8E3-990B07DC9CEB}"/>
               </a:ext>
             </a:extLst>
           </p:cNvPr>
@@ -6236,7 +6236,7 @@
           <p:cNvPr id="15" name="">
             <a:extLst xmlns:a="http://schemas.openxmlformats.org/drawingml/2006/main">
               <a:ext uri="{FF2B5EF4-FFF2-40B4-BE49-F238E27FC236}">
-                <a16:creationId xmlns:a16="http://schemas.microsoft.com/office/drawing/2014/main" id="{0B8527F8-83B3-42C1-BC60-A9B607565656}"/>
+                <a16:creationId xmlns:a16="http://schemas.microsoft.com/office/drawing/2014/main" id="{6764BAC2-C78F-4F64-9958-26AE232D3C2B}"/>
               </a:ext>
             </a:extLst>
           </p:cNvPr>
@@ -6268,7 +6268,7 @@
           <p:cNvPr id="16" name="">
             <a:extLst xmlns:a="http://schemas.openxmlformats.org/drawingml/2006/main">
               <a:ext uri="{FF2B5EF4-FFF2-40B4-BE49-F238E27FC236}">
-                <a16:creationId xmlns:a16="http://schemas.microsoft.com/office/drawing/2014/main" id="{3089E431-E835-422C-8796-A3547FE11458}"/>
+                <a16:creationId xmlns:a16="http://schemas.microsoft.com/office/drawing/2014/main" id="{A532EBD2-041B-4605-8D54-AC25BFFC15D2}"/>
               </a:ext>
             </a:extLst>
           </p:cNvPr>
@@ -6325,7 +6325,7 @@
           <p:cNvPr id="17" name="">
             <a:extLst xmlns:a="http://schemas.openxmlformats.org/drawingml/2006/main">
               <a:ext uri="{FF2B5EF4-FFF2-40B4-BE49-F238E27FC236}">
-                <a16:creationId xmlns:a16="http://schemas.microsoft.com/office/drawing/2014/main" id="{8463962E-FEA5-41F9-8FC6-16A26FEBCABF}"/>
+                <a16:creationId xmlns:a16="http://schemas.microsoft.com/office/drawing/2014/main" id="{117AAD5D-5C3A-4148-B346-5EC4D9B808E5}"/>
               </a:ext>
             </a:extLst>
           </p:cNvPr>
@@ -6382,7 +6382,7 @@
           <p:cNvPr id="18" name="">
             <a:extLst xmlns:a="http://schemas.openxmlformats.org/drawingml/2006/main">
               <a:ext uri="{FF2B5EF4-FFF2-40B4-BE49-F238E27FC236}">
-                <a16:creationId xmlns:a16="http://schemas.microsoft.com/office/drawing/2014/main" id="{2F86DD80-B1ED-45A7-845C-BB2485962902}"/>
+                <a16:creationId xmlns:a16="http://schemas.microsoft.com/office/drawing/2014/main" id="{F4BAC78D-687F-404A-A4FB-24948AF25E57}"/>
               </a:ext>
             </a:extLst>
           </p:cNvPr>
@@ -6416,7 +6416,7 @@
           <p:cNvPr id="19" name="">
             <a:extLst xmlns:a="http://schemas.openxmlformats.org/drawingml/2006/main">
               <a:ext uri="{FF2B5EF4-FFF2-40B4-BE49-F238E27FC236}">
-                <a16:creationId xmlns:a16="http://schemas.microsoft.com/office/drawing/2014/main" id="{ED0BB7A9-157B-429A-8EB8-7C545C487FCE}"/>
+                <a16:creationId xmlns:a16="http://schemas.microsoft.com/office/drawing/2014/main" id="{CA6D0C89-9AA4-41D8-AE26-FDCA61B28BE9}"/>
               </a:ext>
             </a:extLst>
           </p:cNvPr>
@@ -6448,7 +6448,7 @@
           <p:cNvPr id="20" name="">
             <a:extLst xmlns:a="http://schemas.openxmlformats.org/drawingml/2006/main">
               <a:ext uri="{FF2B5EF4-FFF2-40B4-BE49-F238E27FC236}">
-                <a16:creationId xmlns:a16="http://schemas.microsoft.com/office/drawing/2014/main" id="{6EC551A3-4B0F-4DA4-9BC3-C6C9CE927574}"/>
+                <a16:creationId xmlns:a16="http://schemas.microsoft.com/office/drawing/2014/main" id="{95940AA2-9A62-43DE-BBCF-9A01A16ABAD0}"/>
               </a:ext>
             </a:extLst>
           </p:cNvPr>
@@ -6505,7 +6505,7 @@
           <p:cNvPr id="21" name="">
             <a:extLst xmlns:a="http://schemas.openxmlformats.org/drawingml/2006/main">
               <a:ext uri="{FF2B5EF4-FFF2-40B4-BE49-F238E27FC236}">
-                <a16:creationId xmlns:a16="http://schemas.microsoft.com/office/drawing/2014/main" id="{5BA97177-479D-4BB1-BEA2-B42E72D75159}"/>
+                <a16:creationId xmlns:a16="http://schemas.microsoft.com/office/drawing/2014/main" id="{7A202DF5-8E07-4ED7-BBA7-DC7C25DBC111}"/>
               </a:ext>
             </a:extLst>
           </p:cNvPr>
@@ -6562,7 +6562,7 @@
           <p:cNvPr id="22" name="">
             <a:extLst xmlns:a="http://schemas.openxmlformats.org/drawingml/2006/main">
               <a:ext uri="{FF2B5EF4-FFF2-40B4-BE49-F238E27FC236}">
-                <a16:creationId xmlns:a16="http://schemas.microsoft.com/office/drawing/2014/main" id="{7E63B993-2594-4CBB-A3B9-61D9A4041240}"/>
+                <a16:creationId xmlns:a16="http://schemas.microsoft.com/office/drawing/2014/main" id="{227730C1-CF2D-4A94-874B-F1CA8C934007}"/>
               </a:ext>
             </a:extLst>
           </p:cNvPr>
@@ -6617,7 +6617,7 @@
     </p:spTree>
     <p:extLst>
       <p:ext uri="{BB962C8B-B14F-4D97-AF65-F5344CB8AC3E}">
-        <p14:creationId xmlns:p14="http://schemas.microsoft.com/office/powerpoint/2010/main" val="860892263"/>
+        <p14:creationId xmlns:p14="http://schemas.microsoft.com/office/powerpoint/2010/main" val="883267405"/>
       </p:ext>
     </p:extLst>
   </p:cSld>
@@ -6818,7 +6818,7 @@
           <p:cNvPr id="16" name="">
             <a:extLst xmlns:a="http://schemas.openxmlformats.org/drawingml/2006/main">
               <a:ext uri="{FF2B5EF4-FFF2-40B4-BE49-F238E27FC236}">
-                <a16:creationId xmlns:a16="http://schemas.microsoft.com/office/drawing/2014/main" id="{0B319440-75D2-46D8-8E95-CB1A9039E747}"/>
+                <a16:creationId xmlns:a16="http://schemas.microsoft.com/office/drawing/2014/main" id="{8A540F78-F682-43EF-B0C5-8E1C7299FCC8}"/>
               </a:ext>
             </a:extLst>
           </p:cNvPr>
@@ -6850,7 +6850,7 @@
           <p:cNvPr id="2" name="">
             <a:extLst xmlns:a="http://schemas.openxmlformats.org/drawingml/2006/main">
               <a:ext uri="{FF2B5EF4-FFF2-40B4-BE49-F238E27FC236}">
-                <a16:creationId xmlns:a16="http://schemas.microsoft.com/office/drawing/2014/main" id="{62074387-6B42-4AE0-BA1F-DAD2E89610A1}"/>
+                <a16:creationId xmlns:a16="http://schemas.microsoft.com/office/drawing/2014/main" id="{D36131F6-3B3C-4739-9691-7B1C816BF00B}"/>
               </a:ext>
             </a:extLst>
           </p:cNvPr>
@@ -6907,7 +6907,7 @@
           <p:cNvPr id="3" name="">
             <a:extLst xmlns:a="http://schemas.openxmlformats.org/drawingml/2006/main">
               <a:ext uri="{FF2B5EF4-FFF2-40B4-BE49-F238E27FC236}">
-                <a16:creationId xmlns:a16="http://schemas.microsoft.com/office/drawing/2014/main" id="{C01EBA6F-40AD-4D16-A355-95D72265CC07}"/>
+                <a16:creationId xmlns:a16="http://schemas.microsoft.com/office/drawing/2014/main" id="{D1036D26-F4DC-4910-A459-7F95DB087303}"/>
               </a:ext>
             </a:extLst>
           </p:cNvPr>
@@ -6939,7 +6939,7 @@
           <p:cNvPr id="4" name="">
             <a:extLst xmlns:a="http://schemas.openxmlformats.org/drawingml/2006/main">
               <a:ext uri="{FF2B5EF4-FFF2-40B4-BE49-F238E27FC236}">
-                <a16:creationId xmlns:a16="http://schemas.microsoft.com/office/drawing/2014/main" id="{656DD005-4A21-4F4A-BD0E-624E41DCB0C1}"/>
+                <a16:creationId xmlns:a16="http://schemas.microsoft.com/office/drawing/2014/main" id="{92482FF3-AF8D-403E-9B41-3BE298D0BDAF}"/>
               </a:ext>
             </a:extLst>
           </p:cNvPr>
@@ -6996,7 +6996,7 @@
           <p:cNvPr id="5" name="">
             <a:extLst xmlns:a="http://schemas.openxmlformats.org/drawingml/2006/main">
               <a:ext uri="{FF2B5EF4-FFF2-40B4-BE49-F238E27FC236}">
-                <a16:creationId xmlns:a16="http://schemas.microsoft.com/office/drawing/2014/main" id="{747BE09B-4311-4596-A524-2E75873267E6}"/>
+                <a16:creationId xmlns:a16="http://schemas.microsoft.com/office/drawing/2014/main" id="{E94209A3-F484-4F02-8667-DE9A950208F4}"/>
               </a:ext>
             </a:extLst>
           </p:cNvPr>
@@ -7053,7 +7053,7 @@
           <p:cNvPr id="6" name="">
             <a:extLst xmlns:a="http://schemas.openxmlformats.org/drawingml/2006/main">
               <a:ext uri="{FF2B5EF4-FFF2-40B4-BE49-F238E27FC236}">
-                <a16:creationId xmlns:a16="http://schemas.microsoft.com/office/drawing/2014/main" id="{ADFD01DE-148C-4DD9-9F34-9521F9402B4D}"/>
+                <a16:creationId xmlns:a16="http://schemas.microsoft.com/office/drawing/2014/main" id="{D81CBD19-F17D-4439-A52B-FB867D568CE7}"/>
               </a:ext>
             </a:extLst>
           </p:cNvPr>
@@ -7110,7 +7110,7 @@
           <p:cNvPr id="7" name="">
             <a:extLst xmlns:a="http://schemas.openxmlformats.org/drawingml/2006/main">
               <a:ext uri="{FF2B5EF4-FFF2-40B4-BE49-F238E27FC236}">
-                <a16:creationId xmlns:a16="http://schemas.microsoft.com/office/drawing/2014/main" id="{F3D3244E-95AF-4F56-873C-F5BB343AF627}"/>
+                <a16:creationId xmlns:a16="http://schemas.microsoft.com/office/drawing/2014/main" id="{8E57CB29-FA2E-43F3-A3F2-76C475878A71}"/>
               </a:ext>
             </a:extLst>
           </p:cNvPr>
@@ -7142,7 +7142,7 @@
           <p:cNvPr id="8" name="">
             <a:extLst xmlns:a="http://schemas.openxmlformats.org/drawingml/2006/main">
               <a:ext uri="{FF2B5EF4-FFF2-40B4-BE49-F238E27FC236}">
-                <a16:creationId xmlns:a16="http://schemas.microsoft.com/office/drawing/2014/main" id="{613893DF-452F-4471-9110-26DB0DF5BAB9}"/>
+                <a16:creationId xmlns:a16="http://schemas.microsoft.com/office/drawing/2014/main" id="{862CED23-21FF-4614-97EE-8F336F135FAF}"/>
               </a:ext>
             </a:extLst>
           </p:cNvPr>
@@ -7199,7 +7199,7 @@
           <p:cNvPr id="9" name="">
             <a:extLst xmlns:a="http://schemas.openxmlformats.org/drawingml/2006/main">
               <a:ext uri="{FF2B5EF4-FFF2-40B4-BE49-F238E27FC236}">
-                <a16:creationId xmlns:a16="http://schemas.microsoft.com/office/drawing/2014/main" id="{7571AC6A-5D34-4EF6-81C4-386F4F8F846B}"/>
+                <a16:creationId xmlns:a16="http://schemas.microsoft.com/office/drawing/2014/main" id="{4287ED53-4A04-4CB8-84EE-F139054A9271}"/>
               </a:ext>
             </a:extLst>
           </p:cNvPr>
@@ -7256,7 +7256,7 @@
           <p:cNvPr id="10" name="">
             <a:extLst xmlns:a="http://schemas.openxmlformats.org/drawingml/2006/main">
               <a:ext uri="{FF2B5EF4-FFF2-40B4-BE49-F238E27FC236}">
-                <a16:creationId xmlns:a16="http://schemas.microsoft.com/office/drawing/2014/main" id="{5E52DF51-588A-4FBD-B1FA-17E1893A1675}"/>
+                <a16:creationId xmlns:a16="http://schemas.microsoft.com/office/drawing/2014/main" id="{35536BB6-0177-4B8A-9D68-D6CC32246B9A}"/>
               </a:ext>
             </a:extLst>
           </p:cNvPr>
@@ -7313,7 +7313,7 @@
           <p:cNvPr id="11" name="">
             <a:extLst xmlns:a="http://schemas.openxmlformats.org/drawingml/2006/main">
               <a:ext uri="{FF2B5EF4-FFF2-40B4-BE49-F238E27FC236}">
-                <a16:creationId xmlns:a16="http://schemas.microsoft.com/office/drawing/2014/main" id="{2B8315A4-D45D-475D-96D2-C13C05B8D202}"/>
+                <a16:creationId xmlns:a16="http://schemas.microsoft.com/office/drawing/2014/main" id="{279C58F6-A627-4D86-916E-05BE8135C599}"/>
               </a:ext>
             </a:extLst>
           </p:cNvPr>
@@ -7345,7 +7345,7 @@
           <p:cNvPr id="12" name="">
             <a:extLst xmlns:a="http://schemas.openxmlformats.org/drawingml/2006/main">
               <a:ext uri="{FF2B5EF4-FFF2-40B4-BE49-F238E27FC236}">
-                <a16:creationId xmlns:a16="http://schemas.microsoft.com/office/drawing/2014/main" id="{08817C07-41AE-4E0C-892A-B25804C56B77}"/>
+                <a16:creationId xmlns:a16="http://schemas.microsoft.com/office/drawing/2014/main" id="{6B913B1D-EF7F-4C27-B4AA-C2B1AE555FA1}"/>
               </a:ext>
             </a:extLst>
           </p:cNvPr>
@@ -7402,7 +7402,7 @@
           <p:cNvPr id="13" name="">
             <a:extLst xmlns:a="http://schemas.openxmlformats.org/drawingml/2006/main">
               <a:ext uri="{FF2B5EF4-FFF2-40B4-BE49-F238E27FC236}">
-                <a16:creationId xmlns:a16="http://schemas.microsoft.com/office/drawing/2014/main" id="{DF9A945F-C1C5-4147-BAF9-DD8FF2BBB00E}"/>
+                <a16:creationId xmlns:a16="http://schemas.microsoft.com/office/drawing/2014/main" id="{12987EFE-8684-4872-901A-4393A863AA10}"/>
               </a:ext>
             </a:extLst>
           </p:cNvPr>
@@ -7459,7 +7459,7 @@
           <p:cNvPr id="14" name="">
             <a:extLst xmlns:a="http://schemas.openxmlformats.org/drawingml/2006/main">
               <a:ext uri="{FF2B5EF4-FFF2-40B4-BE49-F238E27FC236}">
-                <a16:creationId xmlns:a16="http://schemas.microsoft.com/office/drawing/2014/main" id="{1FAE5BDB-5747-4E73-BA57-F4CF124C4711}"/>
+                <a16:creationId xmlns:a16="http://schemas.microsoft.com/office/drawing/2014/main" id="{B9FB95FE-78C1-41A7-88FF-2728C71DA07F}"/>
               </a:ext>
             </a:extLst>
           </p:cNvPr>
@@ -7516,7 +7516,7 @@
           <p:cNvPr id="15" name="">
             <a:extLst xmlns:a="http://schemas.openxmlformats.org/drawingml/2006/main">
               <a:ext uri="{FF2B5EF4-FFF2-40B4-BE49-F238E27FC236}">
-                <a16:creationId xmlns:a16="http://schemas.microsoft.com/office/drawing/2014/main" id="{23F67785-DD5F-4EFD-8DBF-0F38B933A63B}"/>
+                <a16:creationId xmlns:a16="http://schemas.microsoft.com/office/drawing/2014/main" id="{2B489590-6C1C-4CBA-8DFF-82CD7B664EC8}"/>
               </a:ext>
             </a:extLst>
           </p:cNvPr>
@@ -7571,7 +7571,7 @@
     </p:spTree>
     <p:extLst>
       <p:ext uri="{BB962C8B-B14F-4D97-AF65-F5344CB8AC3E}">
-        <p14:creationId xmlns:p14="http://schemas.microsoft.com/office/powerpoint/2010/main" val="1181452125"/>
+        <p14:creationId xmlns:p14="http://schemas.microsoft.com/office/powerpoint/2010/main" val="579978892"/>
       </p:ext>
     </p:extLst>
   </p:cSld>
@@ -7772,7 +7772,7 @@
           <p:cNvPr id="23" name="">
             <a:extLst xmlns:a="http://schemas.openxmlformats.org/drawingml/2006/main">
               <a:ext uri="{FF2B5EF4-FFF2-40B4-BE49-F238E27FC236}">
-                <a16:creationId xmlns:a16="http://schemas.microsoft.com/office/drawing/2014/main" id="{C27A3512-B980-45C8-8959-15DB0F61615A}"/>
+                <a16:creationId xmlns:a16="http://schemas.microsoft.com/office/drawing/2014/main" id="{70B03AB3-48E6-4A11-BD8A-826B29EBB598}"/>
               </a:ext>
             </a:extLst>
           </p:cNvPr>
@@ -7804,7 +7804,7 @@
           <p:cNvPr id="2" name="">
             <a:extLst xmlns:a="http://schemas.openxmlformats.org/drawingml/2006/main">
               <a:ext uri="{FF2B5EF4-FFF2-40B4-BE49-F238E27FC236}">
-                <a16:creationId xmlns:a16="http://schemas.microsoft.com/office/drawing/2014/main" id="{51C42193-FD80-426A-8B9A-6B6653B158DC}"/>
+                <a16:creationId xmlns:a16="http://schemas.microsoft.com/office/drawing/2014/main" id="{E98F9D8B-977E-468E-BCF2-A9F54E2C61FE}"/>
               </a:ext>
             </a:extLst>
           </p:cNvPr>
@@ -7861,7 +7861,7 @@
           <p:cNvPr id="3" name="">
             <a:extLst xmlns:a="http://schemas.openxmlformats.org/drawingml/2006/main">
               <a:ext uri="{FF2B5EF4-FFF2-40B4-BE49-F238E27FC236}">
-                <a16:creationId xmlns:a16="http://schemas.microsoft.com/office/drawing/2014/main" id="{E7F68A2B-E1EC-4005-8F45-4E7CC669D285}"/>
+                <a16:creationId xmlns:a16="http://schemas.microsoft.com/office/drawing/2014/main" id="{8443516A-904A-45D9-A479-38AF016A647B}"/>
               </a:ext>
             </a:extLst>
           </p:cNvPr>
@@ -7893,7 +7893,7 @@
           <p:cNvPr id="4" name="">
             <a:extLst xmlns:a="http://schemas.openxmlformats.org/drawingml/2006/main">
               <a:ext uri="{FF2B5EF4-FFF2-40B4-BE49-F238E27FC236}">
-                <a16:creationId xmlns:a16="http://schemas.microsoft.com/office/drawing/2014/main" id="{A189C45C-81D7-4DCF-8CB9-A10273DF20CD}"/>
+                <a16:creationId xmlns:a16="http://schemas.microsoft.com/office/drawing/2014/main" id="{6AE4D7F8-BBCF-45A8-B02F-B4AC4D27659A}"/>
               </a:ext>
             </a:extLst>
           </p:cNvPr>
@@ -7950,7 +7950,7 @@
           <p:cNvPr id="5" name="">
             <a:extLst xmlns:a="http://schemas.openxmlformats.org/drawingml/2006/main">
               <a:ext uri="{FF2B5EF4-FFF2-40B4-BE49-F238E27FC236}">
-                <a16:creationId xmlns:a16="http://schemas.microsoft.com/office/drawing/2014/main" id="{EE7C9A87-6A4E-40E0-A0F7-1147A3A5476A}"/>
+                <a16:creationId xmlns:a16="http://schemas.microsoft.com/office/drawing/2014/main" id="{3A60C9DC-020B-40E1-8149-51DA25E7BBD7}"/>
               </a:ext>
             </a:extLst>
           </p:cNvPr>
@@ -8007,7 +8007,7 @@
           <p:cNvPr id="6" name="">
             <a:extLst xmlns:a="http://schemas.openxmlformats.org/drawingml/2006/main">
               <a:ext uri="{FF2B5EF4-FFF2-40B4-BE49-F238E27FC236}">
-                <a16:creationId xmlns:a16="http://schemas.microsoft.com/office/drawing/2014/main" id="{FD9885C8-71CB-4D1A-9B7D-490565AA7AAE}"/>
+                <a16:creationId xmlns:a16="http://schemas.microsoft.com/office/drawing/2014/main" id="{FDB50BDC-D0B4-44BD-8CF7-81232DEF806C}"/>
               </a:ext>
             </a:extLst>
           </p:cNvPr>
@@ -8064,7 +8064,7 @@
           <p:cNvPr id="7" name="">
             <a:extLst xmlns:a="http://schemas.openxmlformats.org/drawingml/2006/main">
               <a:ext uri="{FF2B5EF4-FFF2-40B4-BE49-F238E27FC236}">
-                <a16:creationId xmlns:a16="http://schemas.microsoft.com/office/drawing/2014/main" id="{89403B68-891F-429C-A3F9-B6F10C382C57}"/>
+                <a16:creationId xmlns:a16="http://schemas.microsoft.com/office/drawing/2014/main" id="{1F8F2497-B158-4EDF-AFB8-98F2F71890B9}"/>
               </a:ext>
             </a:extLst>
           </p:cNvPr>
@@ -8096,7 +8096,7 @@
           <p:cNvPr id="8" name="">
             <a:extLst xmlns:a="http://schemas.openxmlformats.org/drawingml/2006/main">
               <a:ext uri="{FF2B5EF4-FFF2-40B4-BE49-F238E27FC236}">
-                <a16:creationId xmlns:a16="http://schemas.microsoft.com/office/drawing/2014/main" id="{B9D869F2-6AE8-4329-A7CE-D464A655C5C5}"/>
+                <a16:creationId xmlns:a16="http://schemas.microsoft.com/office/drawing/2014/main" id="{42FD7434-62C6-4219-B209-E64747347483}"/>
               </a:ext>
             </a:extLst>
           </p:cNvPr>
@@ -8153,7 +8153,7 @@
           <p:cNvPr id="9" name="">
             <a:extLst xmlns:a="http://schemas.openxmlformats.org/drawingml/2006/main">
               <a:ext uri="{FF2B5EF4-FFF2-40B4-BE49-F238E27FC236}">
-                <a16:creationId xmlns:a16="http://schemas.microsoft.com/office/drawing/2014/main" id="{61003FD0-AF6B-4A92-97A4-060CD5D13918}"/>
+                <a16:creationId xmlns:a16="http://schemas.microsoft.com/office/drawing/2014/main" id="{0A8FDD75-CC30-45C9-928E-497ED36B5BE4}"/>
               </a:ext>
             </a:extLst>
           </p:cNvPr>
@@ -8210,19 +8210,19 @@
           <p:cNvPr id="10" name="">
             <a:extLst xmlns:a="http://schemas.openxmlformats.org/drawingml/2006/main">
               <a:ext uri="{FF2B5EF4-FFF2-40B4-BE49-F238E27FC236}">
-                <a16:creationId xmlns:a16="http://schemas.microsoft.com/office/drawing/2014/main" id="{F12B6B41-B0DF-47F6-B765-028CBF1D1650}"/>
-              </a:ext>
-            </a:extLst>
-          </p:cNvPr>
-          <p:cNvSpPr>
-            <a:spLocks xmlns:a="http://schemas.openxmlformats.org/drawingml/2006/main" noGrp="1"/>
-          </p:cNvSpPr>
-          <p:nvPr/>
-        </p:nvSpPr>
-        <p:spPr>
-          <a:xfrm xmlns:a="http://schemas.openxmlformats.org/drawingml/2006/main">
-            <a:off x="914400" y="1257300"/>
-            <a:ext cx="10363200" cy="781050"/>
+                <a16:creationId xmlns:a16="http://schemas.microsoft.com/office/drawing/2014/main" id="{660F4577-683B-49CA-8058-BCC01F1747A0}"/>
+              </a:ext>
+            </a:extLst>
+          </p:cNvPr>
+          <p:cNvSpPr>
+            <a:spLocks xmlns:a="http://schemas.openxmlformats.org/drawingml/2006/main" noGrp="1"/>
+          </p:cNvSpPr>
+          <p:nvPr/>
+        </p:nvSpPr>
+        <p:spPr>
+          <a:xfrm xmlns:a="http://schemas.openxmlformats.org/drawingml/2006/main">
+            <a:off x="857250" y="1219200"/>
+            <a:ext cx="10477500" cy="742950"/>
           </a:xfrm>
           <a:prstGeom xmlns:a="http://schemas.openxmlformats.org/drawingml/2006/main" prst="rect">
             <a:avLst/>
@@ -8239,7 +8239,7 @@
           <a:lstStyle xmlns:a="http://schemas.openxmlformats.org/drawingml/2006/main"/>
           <a:p xmlns:a="http://schemas.openxmlformats.org/drawingml/2006/main">
             <a:pPr algn="ctr">
-              <a:defRPr sz="2175" b="1">
+              <a:defRPr sz="2100" b="1">
                 <a:solidFill>
                   <a:srgbClr val="17253A"/>
                 </a:solidFill>
@@ -8249,7 +8249,7 @@
               </a:defRPr>
             </a:pPr>
             <a:r>
-              <a:rPr sz="2175" b="1">
+              <a:rPr sz="2100" b="1">
                 <a:solidFill>
                   <a:srgbClr val="17253A"/>
                 </a:solidFill>
@@ -8267,28 +8267,30 @@
           <p:cNvPr id="11" name="">
             <a:extLst xmlns:a="http://schemas.openxmlformats.org/drawingml/2006/main">
               <a:ext uri="{FF2B5EF4-FFF2-40B4-BE49-F238E27FC236}">
-                <a16:creationId xmlns:a16="http://schemas.microsoft.com/office/drawing/2014/main" id="{0137F604-E212-4A32-97C2-0530040A194A}"/>
-              </a:ext>
-            </a:extLst>
-          </p:cNvPr>
-          <p:cNvSpPr>
-            <a:spLocks xmlns:a="http://schemas.openxmlformats.org/drawingml/2006/main" noGrp="1"/>
-          </p:cNvSpPr>
-          <p:nvPr/>
-        </p:nvSpPr>
-        <p:spPr>
-          <a:xfrm xmlns:a="http://schemas.openxmlformats.org/drawingml/2006/main">
-            <a:off x="1000125" y="2247900"/>
-            <a:ext cx="476250" cy="476250"/>
-          </a:xfrm>
-          <a:prstGeom xmlns:a="http://schemas.openxmlformats.org/drawingml/2006/main" prst="ellipse">
+                <a16:creationId xmlns:a16="http://schemas.microsoft.com/office/drawing/2014/main" id="{9D28EF3F-6AAE-4388-B23C-877F6484C4B5}"/>
+              </a:ext>
+            </a:extLst>
+          </p:cNvPr>
+          <p:cNvSpPr>
+            <a:spLocks xmlns:a="http://schemas.openxmlformats.org/drawingml/2006/main" noGrp="1"/>
+          </p:cNvSpPr>
+          <p:nvPr/>
+        </p:nvSpPr>
+        <p:spPr>
+          <a:xfrm xmlns:a="http://schemas.openxmlformats.org/drawingml/2006/main">
+            <a:off x="971550" y="2124075"/>
+            <a:ext cx="38100" cy="3524250"/>
+          </a:xfrm>
+          <a:prstGeom xmlns:a="http://schemas.openxmlformats.org/drawingml/2006/main" prst="rect">
             <a:avLst/>
           </a:prstGeom>
           <a:solidFill xmlns:a="http://schemas.openxmlformats.org/drawingml/2006/main">
-            <a:srgbClr val="18324A"/>
+            <a:srgbClr val="2C6E73"/>
           </a:solidFill>
           <a:ln xmlns:a="http://schemas.openxmlformats.org/drawingml/2006/main" w="0">
-            <a:noFill/>
+            <a:solidFill>
+              <a:srgbClr val="2C6E73"/>
+            </a:solidFill>
           </a:ln>
         </p:spPr>
       </p:sp>
@@ -8297,19 +8299,19 @@
           <p:cNvPr id="12" name="">
             <a:extLst xmlns:a="http://schemas.openxmlformats.org/drawingml/2006/main">
               <a:ext uri="{FF2B5EF4-FFF2-40B4-BE49-F238E27FC236}">
-                <a16:creationId xmlns:a16="http://schemas.microsoft.com/office/drawing/2014/main" id="{29E69862-DF8E-4CCE-A71A-4F116E2DA449}"/>
-              </a:ext>
-            </a:extLst>
-          </p:cNvPr>
-          <p:cNvSpPr>
-            <a:spLocks xmlns:a="http://schemas.openxmlformats.org/drawingml/2006/main" noGrp="1"/>
-          </p:cNvSpPr>
-          <p:nvPr/>
-        </p:nvSpPr>
-        <p:spPr>
-          <a:xfrm xmlns:a="http://schemas.openxmlformats.org/drawingml/2006/main">
-            <a:off x="1000125" y="2276475"/>
-            <a:ext cx="476250" cy="419100"/>
+                <a16:creationId xmlns:a16="http://schemas.microsoft.com/office/drawing/2014/main" id="{C76A4E3A-8BA6-41F4-8C7A-7F6E4AEB6D07}"/>
+              </a:ext>
+            </a:extLst>
+          </p:cNvPr>
+          <p:cNvSpPr>
+            <a:spLocks xmlns:a="http://schemas.openxmlformats.org/drawingml/2006/main" noGrp="1"/>
+          </p:cNvSpPr>
+          <p:nvPr/>
+        </p:nvSpPr>
+        <p:spPr>
+          <a:xfrm xmlns:a="http://schemas.openxmlformats.org/drawingml/2006/main">
+            <a:off x="1162050" y="2200275"/>
+            <a:ext cx="400050" cy="400050"/>
           </a:xfrm>
           <a:prstGeom xmlns:a="http://schemas.openxmlformats.org/drawingml/2006/main" prst="rect">
             <a:avLst/>
@@ -8326,9 +8328,9 @@
           <a:lstStyle xmlns:a="http://schemas.openxmlformats.org/drawingml/2006/main"/>
           <a:p xmlns:a="http://schemas.openxmlformats.org/drawingml/2006/main">
             <a:pPr algn="ctr">
-              <a:defRPr sz="1350" b="1">
-                <a:solidFill>
-                  <a:srgbClr val="FFFFFF"/>
+              <a:defRPr sz="1125" b="1">
+                <a:solidFill>
+                  <a:srgbClr val="2C6E73"/>
                 </a:solidFill>
                 <a:latin typeface="Arial"/>
                 <a:ea typeface="Arial"/>
@@ -8336,9 +8338,9 @@
               </a:defRPr>
             </a:pPr>
             <a:r>
-              <a:rPr sz="1350" b="1">
-                <a:solidFill>
-                  <a:srgbClr val="FFFFFF"/>
+              <a:rPr sz="1125" b="1">
+                <a:solidFill>
+                  <a:srgbClr val="2C6E73"/>
                 </a:solidFill>
                 <a:latin typeface="Arial"/>
                 <a:ea typeface="Arial"/>
@@ -8354,19 +8356,19 @@
           <p:cNvPr id="13" name="">
             <a:extLst xmlns:a="http://schemas.openxmlformats.org/drawingml/2006/main">
               <a:ext uri="{FF2B5EF4-FFF2-40B4-BE49-F238E27FC236}">
-                <a16:creationId xmlns:a16="http://schemas.microsoft.com/office/drawing/2014/main" id="{0AB30F1E-A5FF-4840-AC4E-854C97FD4AB0}"/>
-              </a:ext>
-            </a:extLst>
-          </p:cNvPr>
-          <p:cNvSpPr>
-            <a:spLocks xmlns:a="http://schemas.openxmlformats.org/drawingml/2006/main" noGrp="1"/>
-          </p:cNvSpPr>
-          <p:nvPr/>
-        </p:nvSpPr>
-        <p:spPr>
-          <a:xfrm xmlns:a="http://schemas.openxmlformats.org/drawingml/2006/main">
-            <a:off x="1714500" y="2181225"/>
-            <a:ext cx="9429750" cy="609600"/>
+                <a16:creationId xmlns:a16="http://schemas.microsoft.com/office/drawing/2014/main" id="{B8E11FD3-64E3-4911-AE86-0BB5A9D8EB53}"/>
+              </a:ext>
+            </a:extLst>
+          </p:cNvPr>
+          <p:cNvSpPr>
+            <a:spLocks xmlns:a="http://schemas.openxmlformats.org/drawingml/2006/main" noGrp="1"/>
+          </p:cNvSpPr>
+          <p:nvPr/>
+        </p:nvSpPr>
+        <p:spPr>
+          <a:xfrm xmlns:a="http://schemas.openxmlformats.org/drawingml/2006/main">
+            <a:off x="1714500" y="2114550"/>
+            <a:ext cx="9525000" cy="809625"/>
           </a:xfrm>
           <a:prstGeom xmlns:a="http://schemas.openxmlformats.org/drawingml/2006/main" prst="rect">
             <a:avLst/>
@@ -8383,7 +8385,7 @@
           <a:lstStyle xmlns:a="http://schemas.openxmlformats.org/drawingml/2006/main"/>
           <a:p xmlns:a="http://schemas.openxmlformats.org/drawingml/2006/main">
             <a:pPr algn="l">
-              <a:defRPr sz="1500" b="0">
+              <a:defRPr sz="1725" b="0">
                 <a:solidFill>
                   <a:srgbClr val="17253A"/>
                 </a:solidFill>
@@ -8393,7 +8395,7 @@
               </a:defRPr>
             </a:pPr>
             <a:r>
-              <a:rPr sz="1500" b="0">
+              <a:rPr sz="1725" b="0">
                 <a:solidFill>
                   <a:srgbClr val="17253A"/>
                 </a:solidFill>
@@ -8401,7 +8403,7 @@
                 <a:ea typeface="Arial"/>
                 <a:cs typeface="Arial"/>
               </a:rPr>
-              <a:t>Identify the structure: Underline the place named in the question.</a:t>
+              <a:t>Numbers rounding to 86,000 lie from 85,500 to 86,499</a:t>
             </a:r>
           </a:p>
         </p:txBody>
@@ -8411,28 +8413,30 @@
           <p:cNvPr id="14" name="">
             <a:extLst xmlns:a="http://schemas.openxmlformats.org/drawingml/2006/main">
               <a:ext uri="{FF2B5EF4-FFF2-40B4-BE49-F238E27FC236}">
-                <a16:creationId xmlns:a16="http://schemas.microsoft.com/office/drawing/2014/main" id="{DC7294DD-2E4A-4C82-87D3-87A461F6B976}"/>
-              </a:ext>
-            </a:extLst>
-          </p:cNvPr>
-          <p:cNvSpPr>
-            <a:spLocks xmlns:a="http://schemas.openxmlformats.org/drawingml/2006/main" noGrp="1"/>
-          </p:cNvSpPr>
-          <p:nvPr/>
-        </p:nvSpPr>
-        <p:spPr>
-          <a:xfrm xmlns:a="http://schemas.openxmlformats.org/drawingml/2006/main">
-            <a:off x="1000125" y="2990850"/>
-            <a:ext cx="476250" cy="476250"/>
-          </a:xfrm>
-          <a:prstGeom xmlns:a="http://schemas.openxmlformats.org/drawingml/2006/main" prst="ellipse">
+                <a16:creationId xmlns:a16="http://schemas.microsoft.com/office/drawing/2014/main" id="{8AE35CC7-A95C-4C5F-8A8D-D630D85215ED}"/>
+              </a:ext>
+            </a:extLst>
+          </p:cNvPr>
+          <p:cNvSpPr>
+            <a:spLocks xmlns:a="http://schemas.openxmlformats.org/drawingml/2006/main" noGrp="1"/>
+          </p:cNvSpPr>
+          <p:nvPr/>
+        </p:nvSpPr>
+        <p:spPr>
+          <a:xfrm xmlns:a="http://schemas.openxmlformats.org/drawingml/2006/main">
+            <a:off x="1714500" y="2943225"/>
+            <a:ext cx="9334500" cy="9525"/>
+          </a:xfrm>
+          <a:prstGeom xmlns:a="http://schemas.openxmlformats.org/drawingml/2006/main" prst="rect">
             <a:avLst/>
           </a:prstGeom>
           <a:solidFill xmlns:a="http://schemas.openxmlformats.org/drawingml/2006/main">
-            <a:srgbClr val="2C6E73"/>
+            <a:srgbClr val="D9E0E6"/>
           </a:solidFill>
           <a:ln xmlns:a="http://schemas.openxmlformats.org/drawingml/2006/main" w="0">
-            <a:noFill/>
+            <a:solidFill>
+              <a:srgbClr val="D9E0E6"/>
+            </a:solidFill>
           </a:ln>
         </p:spPr>
       </p:sp>
@@ -8441,19 +8445,19 @@
           <p:cNvPr id="15" name="">
             <a:extLst xmlns:a="http://schemas.openxmlformats.org/drawingml/2006/main">
               <a:ext uri="{FF2B5EF4-FFF2-40B4-BE49-F238E27FC236}">
-                <a16:creationId xmlns:a16="http://schemas.microsoft.com/office/drawing/2014/main" id="{66B135D5-E436-4ADA-855E-9359CAB8CD4F}"/>
-              </a:ext>
-            </a:extLst>
-          </p:cNvPr>
-          <p:cNvSpPr>
-            <a:spLocks xmlns:a="http://schemas.openxmlformats.org/drawingml/2006/main" noGrp="1"/>
-          </p:cNvSpPr>
-          <p:nvPr/>
-        </p:nvSpPr>
-        <p:spPr>
-          <a:xfrm xmlns:a="http://schemas.openxmlformats.org/drawingml/2006/main">
-            <a:off x="1000125" y="3019425"/>
-            <a:ext cx="476250" cy="419100"/>
+                <a16:creationId xmlns:a16="http://schemas.microsoft.com/office/drawing/2014/main" id="{EC9F5BAE-E8BC-4166-AA96-E4D629406C98}"/>
+              </a:ext>
+            </a:extLst>
+          </p:cNvPr>
+          <p:cNvSpPr>
+            <a:spLocks xmlns:a="http://schemas.openxmlformats.org/drawingml/2006/main" noGrp="1"/>
+          </p:cNvSpPr>
+          <p:nvPr/>
+        </p:nvSpPr>
+        <p:spPr>
+          <a:xfrm xmlns:a="http://schemas.openxmlformats.org/drawingml/2006/main">
+            <a:off x="1162050" y="3076575"/>
+            <a:ext cx="400050" cy="400050"/>
           </a:xfrm>
           <a:prstGeom xmlns:a="http://schemas.openxmlformats.org/drawingml/2006/main" prst="rect">
             <a:avLst/>
@@ -8470,9 +8474,9 @@
           <a:lstStyle xmlns:a="http://schemas.openxmlformats.org/drawingml/2006/main"/>
           <a:p xmlns:a="http://schemas.openxmlformats.org/drawingml/2006/main">
             <a:pPr algn="ctr">
-              <a:defRPr sz="1350" b="1">
-                <a:solidFill>
-                  <a:srgbClr val="FFFFFF"/>
+              <a:defRPr sz="1125" b="1">
+                <a:solidFill>
+                  <a:srgbClr val="2C6E73"/>
                 </a:solidFill>
                 <a:latin typeface="Arial"/>
                 <a:ea typeface="Arial"/>
@@ -8480,9 +8484,9 @@
               </a:defRPr>
             </a:pPr>
             <a:r>
-              <a:rPr sz="1350" b="1">
-                <a:solidFill>
-                  <a:srgbClr val="FFFFFF"/>
+              <a:rPr sz="1125" b="1">
+                <a:solidFill>
+                  <a:srgbClr val="2C6E73"/>
                 </a:solidFill>
                 <a:latin typeface="Arial"/>
                 <a:ea typeface="Arial"/>
@@ -8498,19 +8502,19 @@
           <p:cNvPr id="16" name="">
             <a:extLst xmlns:a="http://schemas.openxmlformats.org/drawingml/2006/main">
               <a:ext uri="{FF2B5EF4-FFF2-40B4-BE49-F238E27FC236}">
-                <a16:creationId xmlns:a16="http://schemas.microsoft.com/office/drawing/2014/main" id="{F09C7DDC-B2BB-4D52-B143-94E514B7A8DB}"/>
-              </a:ext>
-            </a:extLst>
-          </p:cNvPr>
-          <p:cNvSpPr>
-            <a:spLocks xmlns:a="http://schemas.openxmlformats.org/drawingml/2006/main" noGrp="1"/>
-          </p:cNvSpPr>
-          <p:nvPr/>
-        </p:nvSpPr>
-        <p:spPr>
-          <a:xfrm xmlns:a="http://schemas.openxmlformats.org/drawingml/2006/main">
-            <a:off x="1714500" y="2924175"/>
-            <a:ext cx="9429750" cy="609600"/>
+                <a16:creationId xmlns:a16="http://schemas.microsoft.com/office/drawing/2014/main" id="{AEE8A3E1-00AA-409C-9444-82D4C9D0FC9A}"/>
+              </a:ext>
+            </a:extLst>
+          </p:cNvPr>
+          <p:cNvSpPr>
+            <a:spLocks xmlns:a="http://schemas.openxmlformats.org/drawingml/2006/main" noGrp="1"/>
+          </p:cNvSpPr>
+          <p:nvPr/>
+        </p:nvSpPr>
+        <p:spPr>
+          <a:xfrm xmlns:a="http://schemas.openxmlformats.org/drawingml/2006/main">
+            <a:off x="1714500" y="2990850"/>
+            <a:ext cx="9525000" cy="809625"/>
           </a:xfrm>
           <a:prstGeom xmlns:a="http://schemas.openxmlformats.org/drawingml/2006/main" prst="rect">
             <a:avLst/>
@@ -8527,7 +8531,7 @@
           <a:lstStyle xmlns:a="http://schemas.openxmlformats.org/drawingml/2006/main"/>
           <a:p xmlns:a="http://schemas.openxmlformats.org/drawingml/2006/main">
             <a:pPr algn="l">
-              <a:defRPr sz="1500" b="0">
+              <a:defRPr sz="1725" b="0">
                 <a:solidFill>
                   <a:srgbClr val="17253A"/>
                 </a:solidFill>
@@ -8537,7 +8541,7 @@
               </a:defRPr>
             </a:pPr>
             <a:r>
-              <a:rPr sz="1500" b="0">
+              <a:rPr sz="1725" b="0">
                 <a:solidFill>
                   <a:srgbClr val="17253A"/>
                 </a:solidFill>
@@ -8545,7 +8549,7 @@
                 <a:ea typeface="Arial"/>
                 <a:cs typeface="Arial"/>
               </a:rPr>
-              <a:t>Set up the method: Check the digit immediately to its right or locate the two boundaries.</a:t>
+              <a:t>Lower boundary = 86,000 - 500</a:t>
             </a:r>
           </a:p>
         </p:txBody>
@@ -8555,28 +8559,30 @@
           <p:cNvPr id="17" name="">
             <a:extLst xmlns:a="http://schemas.openxmlformats.org/drawingml/2006/main">
               <a:ext uri="{FF2B5EF4-FFF2-40B4-BE49-F238E27FC236}">
-                <a16:creationId xmlns:a16="http://schemas.microsoft.com/office/drawing/2014/main" id="{A9AFC41C-A1D4-4C66-BB5F-C5B8AB6F1235}"/>
-              </a:ext>
-            </a:extLst>
-          </p:cNvPr>
-          <p:cNvSpPr>
-            <a:spLocks xmlns:a="http://schemas.openxmlformats.org/drawingml/2006/main" noGrp="1"/>
-          </p:cNvSpPr>
-          <p:nvPr/>
-        </p:nvSpPr>
-        <p:spPr>
-          <a:xfrm xmlns:a="http://schemas.openxmlformats.org/drawingml/2006/main">
-            <a:off x="1000125" y="3733800"/>
-            <a:ext cx="476250" cy="476250"/>
-          </a:xfrm>
-          <a:prstGeom xmlns:a="http://schemas.openxmlformats.org/drawingml/2006/main" prst="ellipse">
+                <a16:creationId xmlns:a16="http://schemas.microsoft.com/office/drawing/2014/main" id="{AE1BE8B3-E55E-42AF-8EB4-183FD6E7A696}"/>
+              </a:ext>
+            </a:extLst>
+          </p:cNvPr>
+          <p:cNvSpPr>
+            <a:spLocks xmlns:a="http://schemas.openxmlformats.org/drawingml/2006/main" noGrp="1"/>
+          </p:cNvSpPr>
+          <p:nvPr/>
+        </p:nvSpPr>
+        <p:spPr>
+          <a:xfrm xmlns:a="http://schemas.openxmlformats.org/drawingml/2006/main">
+            <a:off x="1714500" y="3819525"/>
+            <a:ext cx="9334500" cy="9525"/>
+          </a:xfrm>
+          <a:prstGeom xmlns:a="http://schemas.openxmlformats.org/drawingml/2006/main" prst="rect">
             <a:avLst/>
           </a:prstGeom>
           <a:solidFill xmlns:a="http://schemas.openxmlformats.org/drawingml/2006/main">
-            <a:srgbClr val="2C6E73"/>
+            <a:srgbClr val="D9E0E6"/>
           </a:solidFill>
           <a:ln xmlns:a="http://schemas.openxmlformats.org/drawingml/2006/main" w="0">
-            <a:noFill/>
+            <a:solidFill>
+              <a:srgbClr val="D9E0E6"/>
+            </a:solidFill>
           </a:ln>
         </p:spPr>
       </p:sp>
@@ -8585,19 +8591,19 @@
           <p:cNvPr id="18" name="">
             <a:extLst xmlns:a="http://schemas.openxmlformats.org/drawingml/2006/main">
               <a:ext uri="{FF2B5EF4-FFF2-40B4-BE49-F238E27FC236}">
-                <a16:creationId xmlns:a16="http://schemas.microsoft.com/office/drawing/2014/main" id="{A3CE6E50-DD11-40F6-9880-92ED5B289E6D}"/>
-              </a:ext>
-            </a:extLst>
-          </p:cNvPr>
-          <p:cNvSpPr>
-            <a:spLocks xmlns:a="http://schemas.openxmlformats.org/drawingml/2006/main" noGrp="1"/>
-          </p:cNvSpPr>
-          <p:nvPr/>
-        </p:nvSpPr>
-        <p:spPr>
-          <a:xfrm xmlns:a="http://schemas.openxmlformats.org/drawingml/2006/main">
-            <a:off x="1000125" y="3762375"/>
-            <a:ext cx="476250" cy="419100"/>
+                <a16:creationId xmlns:a16="http://schemas.microsoft.com/office/drawing/2014/main" id="{0035455B-19E6-4631-8083-6062D600815D}"/>
+              </a:ext>
+            </a:extLst>
+          </p:cNvPr>
+          <p:cNvSpPr>
+            <a:spLocks xmlns:a="http://schemas.openxmlformats.org/drawingml/2006/main" noGrp="1"/>
+          </p:cNvSpPr>
+          <p:nvPr/>
+        </p:nvSpPr>
+        <p:spPr>
+          <a:xfrm xmlns:a="http://schemas.openxmlformats.org/drawingml/2006/main">
+            <a:off x="1162050" y="3952875"/>
+            <a:ext cx="400050" cy="400050"/>
           </a:xfrm>
           <a:prstGeom xmlns:a="http://schemas.openxmlformats.org/drawingml/2006/main" prst="rect">
             <a:avLst/>
@@ -8614,9 +8620,9 @@
           <a:lstStyle xmlns:a="http://schemas.openxmlformats.org/drawingml/2006/main"/>
           <a:p xmlns:a="http://schemas.openxmlformats.org/drawingml/2006/main">
             <a:pPr algn="ctr">
-              <a:defRPr sz="1350" b="1">
-                <a:solidFill>
-                  <a:srgbClr val="FFFFFF"/>
+              <a:defRPr sz="1125" b="1">
+                <a:solidFill>
+                  <a:srgbClr val="2C6E73"/>
                 </a:solidFill>
                 <a:latin typeface="Arial"/>
                 <a:ea typeface="Arial"/>
@@ -8624,9 +8630,9 @@
               </a:defRPr>
             </a:pPr>
             <a:r>
-              <a:rPr sz="1350" b="1">
-                <a:solidFill>
-                  <a:srgbClr val="FFFFFF"/>
+              <a:rPr sz="1125" b="1">
+                <a:solidFill>
+                  <a:srgbClr val="2C6E73"/>
                 </a:solidFill>
                 <a:latin typeface="Arial"/>
                 <a:ea typeface="Arial"/>
@@ -8642,19 +8648,19 @@
           <p:cNvPr id="19" name="">
             <a:extLst xmlns:a="http://schemas.openxmlformats.org/drawingml/2006/main">
               <a:ext uri="{FF2B5EF4-FFF2-40B4-BE49-F238E27FC236}">
-                <a16:creationId xmlns:a16="http://schemas.microsoft.com/office/drawing/2014/main" id="{BCC64FFB-6EFF-4FEA-A821-53E9E8E98B11}"/>
-              </a:ext>
-            </a:extLst>
-          </p:cNvPr>
-          <p:cNvSpPr>
-            <a:spLocks xmlns:a="http://schemas.openxmlformats.org/drawingml/2006/main" noGrp="1"/>
-          </p:cNvSpPr>
-          <p:nvPr/>
-        </p:nvSpPr>
-        <p:spPr>
-          <a:xfrm xmlns:a="http://schemas.openxmlformats.org/drawingml/2006/main">
-            <a:off x="1714500" y="3667125"/>
-            <a:ext cx="9429750" cy="609600"/>
+                <a16:creationId xmlns:a16="http://schemas.microsoft.com/office/drawing/2014/main" id="{0F3ADDF4-BA01-4221-8FDB-0F20097A6940}"/>
+              </a:ext>
+            </a:extLst>
+          </p:cNvPr>
+          <p:cNvSpPr>
+            <a:spLocks xmlns:a="http://schemas.openxmlformats.org/drawingml/2006/main" noGrp="1"/>
+          </p:cNvSpPr>
+          <p:nvPr/>
+        </p:nvSpPr>
+        <p:spPr>
+          <a:xfrm xmlns:a="http://schemas.openxmlformats.org/drawingml/2006/main">
+            <a:off x="1714500" y="3867150"/>
+            <a:ext cx="9525000" cy="809625"/>
           </a:xfrm>
           <a:prstGeom xmlns:a="http://schemas.openxmlformats.org/drawingml/2006/main" prst="rect">
             <a:avLst/>
@@ -8671,7 +8677,7 @@
           <a:lstStyle xmlns:a="http://schemas.openxmlformats.org/drawingml/2006/main"/>
           <a:p xmlns:a="http://schemas.openxmlformats.org/drawingml/2006/main">
             <a:pPr algn="l">
-              <a:defRPr sz="1500" b="0">
+              <a:defRPr sz="1725" b="0">
                 <a:solidFill>
                   <a:srgbClr val="17253A"/>
                 </a:solidFill>
@@ -8681,7 +8687,7 @@
               </a:defRPr>
             </a:pPr>
             <a:r>
-              <a:rPr sz="1500" b="0">
+              <a:rPr sz="1725" b="0">
                 <a:solidFill>
                   <a:srgbClr val="17253A"/>
                 </a:solidFill>
@@ -8689,7 +8695,7 @@
                 <a:ea typeface="Arial"/>
                 <a:cs typeface="Arial"/>
               </a:rPr>
-              <a:t>Complete the calculation: 85,500.</a:t>
+              <a:t>86,000 - 500 = 85,500</a:t>
             </a:r>
           </a:p>
         </p:txBody>
@@ -8699,28 +8705,30 @@
           <p:cNvPr id="20" name="">
             <a:extLst xmlns:a="http://schemas.openxmlformats.org/drawingml/2006/main">
               <a:ext uri="{FF2B5EF4-FFF2-40B4-BE49-F238E27FC236}">
-                <a16:creationId xmlns:a16="http://schemas.microsoft.com/office/drawing/2014/main" id="{83D874EB-282F-4868-B6E1-17F2896208B7}"/>
-              </a:ext>
-            </a:extLst>
-          </p:cNvPr>
-          <p:cNvSpPr>
-            <a:spLocks xmlns:a="http://schemas.openxmlformats.org/drawingml/2006/main" noGrp="1"/>
-          </p:cNvSpPr>
-          <p:nvPr/>
-        </p:nvSpPr>
-        <p:spPr>
-          <a:xfrm xmlns:a="http://schemas.openxmlformats.org/drawingml/2006/main">
-            <a:off x="1000125" y="4476750"/>
-            <a:ext cx="476250" cy="476250"/>
-          </a:xfrm>
-          <a:prstGeom xmlns:a="http://schemas.openxmlformats.org/drawingml/2006/main" prst="ellipse">
+                <a16:creationId xmlns:a16="http://schemas.microsoft.com/office/drawing/2014/main" id="{7336AD12-3392-4AAC-B993-1D2CE58BCA9D}"/>
+              </a:ext>
+            </a:extLst>
+          </p:cNvPr>
+          <p:cNvSpPr>
+            <a:spLocks xmlns:a="http://schemas.openxmlformats.org/drawingml/2006/main" noGrp="1"/>
+          </p:cNvSpPr>
+          <p:nvPr/>
+        </p:nvSpPr>
+        <p:spPr>
+          <a:xfrm xmlns:a="http://schemas.openxmlformats.org/drawingml/2006/main">
+            <a:off x="1714500" y="4695825"/>
+            <a:ext cx="9334500" cy="9525"/>
+          </a:xfrm>
+          <a:prstGeom xmlns:a="http://schemas.openxmlformats.org/drawingml/2006/main" prst="rect">
             <a:avLst/>
           </a:prstGeom>
           <a:solidFill xmlns:a="http://schemas.openxmlformats.org/drawingml/2006/main">
-            <a:srgbClr val="2C6E73"/>
+            <a:srgbClr val="D9E0E6"/>
           </a:solidFill>
           <a:ln xmlns:a="http://schemas.openxmlformats.org/drawingml/2006/main" w="0">
-            <a:noFill/>
+            <a:solidFill>
+              <a:srgbClr val="D9E0E6"/>
+            </a:solidFill>
           </a:ln>
         </p:spPr>
       </p:sp>
@@ -8729,19 +8737,19 @@
           <p:cNvPr id="21" name="">
             <a:extLst xmlns:a="http://schemas.openxmlformats.org/drawingml/2006/main">
               <a:ext uri="{FF2B5EF4-FFF2-40B4-BE49-F238E27FC236}">
-                <a16:creationId xmlns:a16="http://schemas.microsoft.com/office/drawing/2014/main" id="{BB749025-3235-4C36-80B6-9C3341F1CC7F}"/>
-              </a:ext>
-            </a:extLst>
-          </p:cNvPr>
-          <p:cNvSpPr>
-            <a:spLocks xmlns:a="http://schemas.openxmlformats.org/drawingml/2006/main" noGrp="1"/>
-          </p:cNvSpPr>
-          <p:nvPr/>
-        </p:nvSpPr>
-        <p:spPr>
-          <a:xfrm xmlns:a="http://schemas.openxmlformats.org/drawingml/2006/main">
-            <a:off x="1000125" y="4505325"/>
-            <a:ext cx="476250" cy="419100"/>
+                <a16:creationId xmlns:a16="http://schemas.microsoft.com/office/drawing/2014/main" id="{4F97B699-59E4-4D97-89C4-F6AB9FEECC29}"/>
+              </a:ext>
+            </a:extLst>
+          </p:cNvPr>
+          <p:cNvSpPr>
+            <a:spLocks xmlns:a="http://schemas.openxmlformats.org/drawingml/2006/main" noGrp="1"/>
+          </p:cNvSpPr>
+          <p:nvPr/>
+        </p:nvSpPr>
+        <p:spPr>
+          <a:xfrm xmlns:a="http://schemas.openxmlformats.org/drawingml/2006/main">
+            <a:off x="1162050" y="4829175"/>
+            <a:ext cx="400050" cy="400050"/>
           </a:xfrm>
           <a:prstGeom xmlns:a="http://schemas.openxmlformats.org/drawingml/2006/main" prst="rect">
             <a:avLst/>
@@ -8758,9 +8766,9 @@
           <a:lstStyle xmlns:a="http://schemas.openxmlformats.org/drawingml/2006/main"/>
           <a:p xmlns:a="http://schemas.openxmlformats.org/drawingml/2006/main">
             <a:pPr algn="ctr">
-              <a:defRPr sz="1350" b="1">
-                <a:solidFill>
-                  <a:srgbClr val="FFFFFF"/>
+              <a:defRPr sz="1125" b="1">
+                <a:solidFill>
+                  <a:srgbClr val="2F785D"/>
                 </a:solidFill>
                 <a:latin typeface="Arial"/>
                 <a:ea typeface="Arial"/>
@@ -8768,9 +8776,9 @@
               </a:defRPr>
             </a:pPr>
             <a:r>
-              <a:rPr sz="1350" b="1">
-                <a:solidFill>
-                  <a:srgbClr val="FFFFFF"/>
+              <a:rPr sz="1125" b="1">
+                <a:solidFill>
+                  <a:srgbClr val="2F785D"/>
                 </a:solidFill>
                 <a:latin typeface="Arial"/>
                 <a:ea typeface="Arial"/>
@@ -8786,19 +8794,19 @@
           <p:cNvPr id="22" name="">
             <a:extLst xmlns:a="http://schemas.openxmlformats.org/drawingml/2006/main">
               <a:ext uri="{FF2B5EF4-FFF2-40B4-BE49-F238E27FC236}">
-                <a16:creationId xmlns:a16="http://schemas.microsoft.com/office/drawing/2014/main" id="{6EE75C7A-A7CC-458B-8527-B6D3BB967FBA}"/>
-              </a:ext>
-            </a:extLst>
-          </p:cNvPr>
-          <p:cNvSpPr>
-            <a:spLocks xmlns:a="http://schemas.openxmlformats.org/drawingml/2006/main" noGrp="1"/>
-          </p:cNvSpPr>
-          <p:nvPr/>
-        </p:nvSpPr>
-        <p:spPr>
-          <a:xfrm xmlns:a="http://schemas.openxmlformats.org/drawingml/2006/main">
-            <a:off x="1714500" y="4410075"/>
-            <a:ext cx="9429750" cy="609600"/>
+                <a16:creationId xmlns:a16="http://schemas.microsoft.com/office/drawing/2014/main" id="{548ED4B6-40EB-450C-A46C-664AAA06EF95}"/>
+              </a:ext>
+            </a:extLst>
+          </p:cNvPr>
+          <p:cNvSpPr>
+            <a:spLocks xmlns:a="http://schemas.openxmlformats.org/drawingml/2006/main" noGrp="1"/>
+          </p:cNvSpPr>
+          <p:nvPr/>
+        </p:nvSpPr>
+        <p:spPr>
+          <a:xfrm xmlns:a="http://schemas.openxmlformats.org/drawingml/2006/main">
+            <a:off x="1714500" y="4743450"/>
+            <a:ext cx="9525000" cy="809625"/>
           </a:xfrm>
           <a:prstGeom xmlns:a="http://schemas.openxmlformats.org/drawingml/2006/main" prst="rect">
             <a:avLst/>
@@ -8815,7 +8823,7 @@
           <a:lstStyle xmlns:a="http://schemas.openxmlformats.org/drawingml/2006/main"/>
           <a:p xmlns:a="http://schemas.openxmlformats.org/drawingml/2006/main">
             <a:pPr algn="l">
-              <a:defRPr sz="1500" b="1">
+              <a:defRPr sz="1725" b="1">
                 <a:solidFill>
                   <a:srgbClr val="2F785D"/>
                 </a:solidFill>
@@ -8825,7 +8833,7 @@
               </a:defRPr>
             </a:pPr>
             <a:r>
-              <a:rPr sz="1500" b="1">
+              <a:rPr sz="1725" b="1">
                 <a:solidFill>
                   <a:srgbClr val="2F785D"/>
                 </a:solidFill>
@@ -8833,7 +8841,7 @@
                 <a:ea typeface="Arial"/>
                 <a:cs typeface="Arial"/>
               </a:rPr>
-              <a:t>Check the result: Round to the nearer multiple and replace following digits with zeros.</a:t>
+              <a:t>Smallest whole number = 85,500</a:t>
             </a:r>
           </a:p>
         </p:txBody>
@@ -8841,7 +8849,7 @@
     </p:spTree>
     <p:extLst>
       <p:ext uri="{BB962C8B-B14F-4D97-AF65-F5344CB8AC3E}">
-        <p14:creationId xmlns:p14="http://schemas.microsoft.com/office/powerpoint/2010/main" val="256211444"/>
+        <p14:creationId xmlns:p14="http://schemas.microsoft.com/office/powerpoint/2010/main" val="1887992524"/>
       </p:ext>
     </p:extLst>
   </p:cSld>
@@ -9134,7 +9142,7 @@
           <p:cNvPr id="15" name="">
             <a:extLst xmlns:a="http://schemas.openxmlformats.org/drawingml/2006/main">
               <a:ext uri="{FF2B5EF4-FFF2-40B4-BE49-F238E27FC236}">
-                <a16:creationId xmlns:a16="http://schemas.microsoft.com/office/drawing/2014/main" id="{25DBB3C9-8C89-4459-837F-6F777EE3245C}"/>
+                <a16:creationId xmlns:a16="http://schemas.microsoft.com/office/drawing/2014/main" id="{A0A00BD0-0B98-4C74-BF33-AC4BC32BCF86}"/>
               </a:ext>
             </a:extLst>
           </p:cNvPr>
@@ -9166,7 +9174,7 @@
           <p:cNvPr id="2" name="">
             <a:extLst xmlns:a="http://schemas.openxmlformats.org/drawingml/2006/main">
               <a:ext uri="{FF2B5EF4-FFF2-40B4-BE49-F238E27FC236}">
-                <a16:creationId xmlns:a16="http://schemas.microsoft.com/office/drawing/2014/main" id="{1C8C8898-A706-47AC-9E68-59EA0A0A74EE}"/>
+                <a16:creationId xmlns:a16="http://schemas.microsoft.com/office/drawing/2014/main" id="{3B4878C0-CA3C-48BC-AAEA-56884639A677}"/>
               </a:ext>
             </a:extLst>
           </p:cNvPr>
@@ -9223,7 +9231,7 @@
           <p:cNvPr id="3" name="">
             <a:extLst xmlns:a="http://schemas.openxmlformats.org/drawingml/2006/main">
               <a:ext uri="{FF2B5EF4-FFF2-40B4-BE49-F238E27FC236}">
-                <a16:creationId xmlns:a16="http://schemas.microsoft.com/office/drawing/2014/main" id="{7666473E-1A8F-4BC2-9EEF-C9CFFA59A471}"/>
+                <a16:creationId xmlns:a16="http://schemas.microsoft.com/office/drawing/2014/main" id="{C360F331-8C73-40C8-912D-5C8D072B975C}"/>
               </a:ext>
             </a:extLst>
           </p:cNvPr>
@@ -9255,7 +9263,7 @@
           <p:cNvPr id="4" name="">
             <a:extLst xmlns:a="http://schemas.openxmlformats.org/drawingml/2006/main">
               <a:ext uri="{FF2B5EF4-FFF2-40B4-BE49-F238E27FC236}">
-                <a16:creationId xmlns:a16="http://schemas.microsoft.com/office/drawing/2014/main" id="{66358F5A-0BFD-4355-B224-997DCA685F66}"/>
+                <a16:creationId xmlns:a16="http://schemas.microsoft.com/office/drawing/2014/main" id="{A0A21187-3A23-41CE-8488-6CD97BE5BDE9}"/>
               </a:ext>
             </a:extLst>
           </p:cNvPr>
@@ -9312,7 +9320,7 @@
           <p:cNvPr id="5" name="">
             <a:extLst xmlns:a="http://schemas.openxmlformats.org/drawingml/2006/main">
               <a:ext uri="{FF2B5EF4-FFF2-40B4-BE49-F238E27FC236}">
-                <a16:creationId xmlns:a16="http://schemas.microsoft.com/office/drawing/2014/main" id="{AE140E29-D9F1-4CAE-BED9-98D2F9C23797}"/>
+                <a16:creationId xmlns:a16="http://schemas.microsoft.com/office/drawing/2014/main" id="{A0586053-00BF-4209-B706-DC020A20540E}"/>
               </a:ext>
             </a:extLst>
           </p:cNvPr>
@@ -9369,7 +9377,7 @@
           <p:cNvPr id="6" name="">
             <a:extLst xmlns:a="http://schemas.openxmlformats.org/drawingml/2006/main">
               <a:ext uri="{FF2B5EF4-FFF2-40B4-BE49-F238E27FC236}">
-                <a16:creationId xmlns:a16="http://schemas.microsoft.com/office/drawing/2014/main" id="{E7555EBF-6921-4B79-ACB6-28CAFE70DDE9}"/>
+                <a16:creationId xmlns:a16="http://schemas.microsoft.com/office/drawing/2014/main" id="{057F8BFC-C69C-453B-836E-F8C5FA7A7E2C}"/>
               </a:ext>
             </a:extLst>
           </p:cNvPr>
@@ -9426,7 +9434,7 @@
           <p:cNvPr id="7" name="">
             <a:extLst xmlns:a="http://schemas.openxmlformats.org/drawingml/2006/main">
               <a:ext uri="{FF2B5EF4-FFF2-40B4-BE49-F238E27FC236}">
-                <a16:creationId xmlns:a16="http://schemas.microsoft.com/office/drawing/2014/main" id="{C2EC88DF-1A5B-4969-98E6-DDE3D9BC5426}"/>
+                <a16:creationId xmlns:a16="http://schemas.microsoft.com/office/drawing/2014/main" id="{A1DE1960-EFB9-485D-9BBE-8DD62EA8F6E7}"/>
               </a:ext>
             </a:extLst>
           </p:cNvPr>
@@ -9458,7 +9466,7 @@
           <p:cNvPr id="8" name="">
             <a:extLst xmlns:a="http://schemas.openxmlformats.org/drawingml/2006/main">
               <a:ext uri="{FF2B5EF4-FFF2-40B4-BE49-F238E27FC236}">
-                <a16:creationId xmlns:a16="http://schemas.microsoft.com/office/drawing/2014/main" id="{5987DC1B-342D-4AEA-AB29-EB894E81A37E}"/>
+                <a16:creationId xmlns:a16="http://schemas.microsoft.com/office/drawing/2014/main" id="{3B6EADB6-1F12-48E0-81D9-6EBA2177F183}"/>
               </a:ext>
             </a:extLst>
           </p:cNvPr>
@@ -9515,7 +9523,7 @@
           <p:cNvPr id="9" name="">
             <a:extLst xmlns:a="http://schemas.openxmlformats.org/drawingml/2006/main">
               <a:ext uri="{FF2B5EF4-FFF2-40B4-BE49-F238E27FC236}">
-                <a16:creationId xmlns:a16="http://schemas.microsoft.com/office/drawing/2014/main" id="{07CC1602-58F5-4BE3-913D-5F8363997E87}"/>
+                <a16:creationId xmlns:a16="http://schemas.microsoft.com/office/drawing/2014/main" id="{F68638EC-E89F-4F80-9817-B508DD0A58BF}"/>
               </a:ext>
             </a:extLst>
           </p:cNvPr>
@@ -9572,7 +9580,7 @@
           <p:cNvPr id="10" name="">
             <a:extLst xmlns:a="http://schemas.openxmlformats.org/drawingml/2006/main">
               <a:ext uri="{FF2B5EF4-FFF2-40B4-BE49-F238E27FC236}">
-                <a16:creationId xmlns:a16="http://schemas.microsoft.com/office/drawing/2014/main" id="{3B6816BE-92B8-4FFC-B042-9A0953726C1D}"/>
+                <a16:creationId xmlns:a16="http://schemas.microsoft.com/office/drawing/2014/main" id="{0A1D42E3-DC97-4BEE-B625-DEB32F33DD97}"/>
               </a:ext>
             </a:extLst>
           </p:cNvPr>
@@ -9629,7 +9637,7 @@
           <p:cNvPr id="11" name="">
             <a:extLst xmlns:a="http://schemas.openxmlformats.org/drawingml/2006/main">
               <a:ext uri="{FF2B5EF4-FFF2-40B4-BE49-F238E27FC236}">
-                <a16:creationId xmlns:a16="http://schemas.microsoft.com/office/drawing/2014/main" id="{C4F1AB1F-E297-4A77-97DD-73D87ED7E257}"/>
+                <a16:creationId xmlns:a16="http://schemas.microsoft.com/office/drawing/2014/main" id="{B7D8EE37-37FB-4066-8607-2EDF3F4CEFCA}"/>
               </a:ext>
             </a:extLst>
           </p:cNvPr>
@@ -9686,7 +9694,7 @@
           <p:cNvPr id="12" name="">
             <a:extLst xmlns:a="http://schemas.openxmlformats.org/drawingml/2006/main">
               <a:ext uri="{FF2B5EF4-FFF2-40B4-BE49-F238E27FC236}">
-                <a16:creationId xmlns:a16="http://schemas.microsoft.com/office/drawing/2014/main" id="{3136CFDE-EF76-4497-A10B-2BCE53341985}"/>
+                <a16:creationId xmlns:a16="http://schemas.microsoft.com/office/drawing/2014/main" id="{208A17B6-A666-45AD-BBD2-ADB16ECFF7B7}"/>
               </a:ext>
             </a:extLst>
           </p:cNvPr>
@@ -9718,7 +9726,7 @@
           <p:cNvPr id="13" name="">
             <a:extLst xmlns:a="http://schemas.openxmlformats.org/drawingml/2006/main">
               <a:ext uri="{FF2B5EF4-FFF2-40B4-BE49-F238E27FC236}">
-                <a16:creationId xmlns:a16="http://schemas.microsoft.com/office/drawing/2014/main" id="{33FB48FD-A4EA-4321-B78F-5BB6D8B0E8A3}"/>
+                <a16:creationId xmlns:a16="http://schemas.microsoft.com/office/drawing/2014/main" id="{F31464C4-8201-4B2C-BA43-518A354C5020}"/>
               </a:ext>
             </a:extLst>
           </p:cNvPr>
@@ -9775,7 +9783,7 @@
           <p:cNvPr id="14" name="">
             <a:extLst xmlns:a="http://schemas.openxmlformats.org/drawingml/2006/main">
               <a:ext uri="{FF2B5EF4-FFF2-40B4-BE49-F238E27FC236}">
-                <a16:creationId xmlns:a16="http://schemas.microsoft.com/office/drawing/2014/main" id="{8771F9F0-8E99-4744-A2F6-9BD0B6206CA9}"/>
+                <a16:creationId xmlns:a16="http://schemas.microsoft.com/office/drawing/2014/main" id="{81E21ECC-9DAB-4219-A60A-8B150D4E5678}"/>
               </a:ext>
             </a:extLst>
           </p:cNvPr>
@@ -9830,7 +9838,7 @@
     </p:spTree>
     <p:extLst>
       <p:ext uri="{BB962C8B-B14F-4D97-AF65-F5344CB8AC3E}">
-        <p14:creationId xmlns:p14="http://schemas.microsoft.com/office/powerpoint/2010/main" val="1429671223"/>
+        <p14:creationId xmlns:p14="http://schemas.microsoft.com/office/powerpoint/2010/main" val="1725010280"/>
       </p:ext>
     </p:extLst>
   </p:cSld>
@@ -10031,7 +10039,7 @@
           <p:cNvPr id="16" name="">
             <a:extLst xmlns:a="http://schemas.openxmlformats.org/drawingml/2006/main">
               <a:ext uri="{FF2B5EF4-FFF2-40B4-BE49-F238E27FC236}">
-                <a16:creationId xmlns:a16="http://schemas.microsoft.com/office/drawing/2014/main" id="{6483B5E0-BD6F-40B8-A406-4DF91DB87854}"/>
+                <a16:creationId xmlns:a16="http://schemas.microsoft.com/office/drawing/2014/main" id="{7206252A-8934-4D73-A36B-24030E16E03D}"/>
               </a:ext>
             </a:extLst>
           </p:cNvPr>
@@ -10063,7 +10071,7 @@
           <p:cNvPr id="2" name="">
             <a:extLst xmlns:a="http://schemas.openxmlformats.org/drawingml/2006/main">
               <a:ext uri="{FF2B5EF4-FFF2-40B4-BE49-F238E27FC236}">
-                <a16:creationId xmlns:a16="http://schemas.microsoft.com/office/drawing/2014/main" id="{7A216FC8-B28D-48C1-8A53-7B5E9BB2EEB4}"/>
+                <a16:creationId xmlns:a16="http://schemas.microsoft.com/office/drawing/2014/main" id="{D3ABE554-2FB2-470C-8DE6-4E7053C6EA29}"/>
               </a:ext>
             </a:extLst>
           </p:cNvPr>
@@ -10120,7 +10128,7 @@
           <p:cNvPr id="3" name="">
             <a:extLst xmlns:a="http://schemas.openxmlformats.org/drawingml/2006/main">
               <a:ext uri="{FF2B5EF4-FFF2-40B4-BE49-F238E27FC236}">
-                <a16:creationId xmlns:a16="http://schemas.microsoft.com/office/drawing/2014/main" id="{71BE2E56-5C75-4005-8340-E18BFA7E87F0}"/>
+                <a16:creationId xmlns:a16="http://schemas.microsoft.com/office/drawing/2014/main" id="{66DFC97E-D86C-4951-9484-DA3950DF4392}"/>
               </a:ext>
             </a:extLst>
           </p:cNvPr>
@@ -10152,7 +10160,7 @@
           <p:cNvPr id="4" name="">
             <a:extLst xmlns:a="http://schemas.openxmlformats.org/drawingml/2006/main">
               <a:ext uri="{FF2B5EF4-FFF2-40B4-BE49-F238E27FC236}">
-                <a16:creationId xmlns:a16="http://schemas.microsoft.com/office/drawing/2014/main" id="{1FBDF42C-DB42-4D47-A8E1-046EF70AFCE5}"/>
+                <a16:creationId xmlns:a16="http://schemas.microsoft.com/office/drawing/2014/main" id="{78FC5C81-2CC1-41CD-B7EA-E35D3328E5D0}"/>
               </a:ext>
             </a:extLst>
           </p:cNvPr>
@@ -10209,7 +10217,7 @@
           <p:cNvPr id="5" name="">
             <a:extLst xmlns:a="http://schemas.openxmlformats.org/drawingml/2006/main">
               <a:ext uri="{FF2B5EF4-FFF2-40B4-BE49-F238E27FC236}">
-                <a16:creationId xmlns:a16="http://schemas.microsoft.com/office/drawing/2014/main" id="{4A721B2E-DDED-448C-8882-2F993F48B8E7}"/>
+                <a16:creationId xmlns:a16="http://schemas.microsoft.com/office/drawing/2014/main" id="{04C0B8CC-DBE8-4541-85DD-915A3C9A22FE}"/>
               </a:ext>
             </a:extLst>
           </p:cNvPr>
@@ -10266,7 +10274,7 @@
           <p:cNvPr id="6" name="">
             <a:extLst xmlns:a="http://schemas.openxmlformats.org/drawingml/2006/main">
               <a:ext uri="{FF2B5EF4-FFF2-40B4-BE49-F238E27FC236}">
-                <a16:creationId xmlns:a16="http://schemas.microsoft.com/office/drawing/2014/main" id="{7E67B9C6-D2C4-4216-8E9B-689A50B058FD}"/>
+                <a16:creationId xmlns:a16="http://schemas.microsoft.com/office/drawing/2014/main" id="{DE89AA20-7643-4993-9990-32AFD4834396}"/>
               </a:ext>
             </a:extLst>
           </p:cNvPr>
@@ -10323,7 +10331,7 @@
           <p:cNvPr id="7" name="">
             <a:extLst xmlns:a="http://schemas.openxmlformats.org/drawingml/2006/main">
               <a:ext uri="{FF2B5EF4-FFF2-40B4-BE49-F238E27FC236}">
-                <a16:creationId xmlns:a16="http://schemas.microsoft.com/office/drawing/2014/main" id="{CD3E09AA-4851-408A-8F3D-451D7AEF2D6F}"/>
+                <a16:creationId xmlns:a16="http://schemas.microsoft.com/office/drawing/2014/main" id="{0E26DC50-2AC3-41E5-A03D-3AA176EBE9A5}"/>
               </a:ext>
             </a:extLst>
           </p:cNvPr>
@@ -10355,7 +10363,7 @@
           <p:cNvPr id="8" name="">
             <a:extLst xmlns:a="http://schemas.openxmlformats.org/drawingml/2006/main">
               <a:ext uri="{FF2B5EF4-FFF2-40B4-BE49-F238E27FC236}">
-                <a16:creationId xmlns:a16="http://schemas.microsoft.com/office/drawing/2014/main" id="{9EEA4F5B-0651-48B8-9097-DDDABAEB08F5}"/>
+                <a16:creationId xmlns:a16="http://schemas.microsoft.com/office/drawing/2014/main" id="{4D0F5984-C274-4693-964E-89D0B1C541C9}"/>
               </a:ext>
             </a:extLst>
           </p:cNvPr>
@@ -10412,7 +10420,7 @@
           <p:cNvPr id="9" name="">
             <a:extLst xmlns:a="http://schemas.openxmlformats.org/drawingml/2006/main">
               <a:ext uri="{FF2B5EF4-FFF2-40B4-BE49-F238E27FC236}">
-                <a16:creationId xmlns:a16="http://schemas.microsoft.com/office/drawing/2014/main" id="{2DCDD287-7EB4-402F-8C5C-8D31CB7B3780}"/>
+                <a16:creationId xmlns:a16="http://schemas.microsoft.com/office/drawing/2014/main" id="{B9E716A3-74E3-484E-BF84-222316BEFBD1}"/>
               </a:ext>
             </a:extLst>
           </p:cNvPr>
@@ -10469,7 +10477,7 @@
           <p:cNvPr id="10" name="">
             <a:extLst xmlns:a="http://schemas.openxmlformats.org/drawingml/2006/main">
               <a:ext uri="{FF2B5EF4-FFF2-40B4-BE49-F238E27FC236}">
-                <a16:creationId xmlns:a16="http://schemas.microsoft.com/office/drawing/2014/main" id="{D549CC4F-A046-4B2F-B06C-813B5A5D898B}"/>
+                <a16:creationId xmlns:a16="http://schemas.microsoft.com/office/drawing/2014/main" id="{262BCEFB-C853-4618-ACC7-B296FC1868D4}"/>
               </a:ext>
             </a:extLst>
           </p:cNvPr>
@@ -10526,7 +10534,7 @@
           <p:cNvPr id="11" name="">
             <a:extLst xmlns:a="http://schemas.openxmlformats.org/drawingml/2006/main">
               <a:ext uri="{FF2B5EF4-FFF2-40B4-BE49-F238E27FC236}">
-                <a16:creationId xmlns:a16="http://schemas.microsoft.com/office/drawing/2014/main" id="{E459F46E-E5C4-4513-AD02-39EE81936E52}"/>
+                <a16:creationId xmlns:a16="http://schemas.microsoft.com/office/drawing/2014/main" id="{0D90E7BD-2E16-481B-B663-9E0414D2D90F}"/>
               </a:ext>
             </a:extLst>
           </p:cNvPr>
@@ -10583,7 +10591,7 @@
           <p:cNvPr id="12" name="">
             <a:extLst xmlns:a="http://schemas.openxmlformats.org/drawingml/2006/main">
               <a:ext uri="{FF2B5EF4-FFF2-40B4-BE49-F238E27FC236}">
-                <a16:creationId xmlns:a16="http://schemas.microsoft.com/office/drawing/2014/main" id="{D3909B6F-D0DB-4EEB-AEB9-75FBCFC24E17}"/>
+                <a16:creationId xmlns:a16="http://schemas.microsoft.com/office/drawing/2014/main" id="{BF40C944-28D6-474D-912C-D5F3931E4553}"/>
               </a:ext>
             </a:extLst>
           </p:cNvPr>
@@ -10640,7 +10648,7 @@
           <p:cNvPr id="13" name="">
             <a:extLst xmlns:a="http://schemas.openxmlformats.org/drawingml/2006/main">
               <a:ext uri="{FF2B5EF4-FFF2-40B4-BE49-F238E27FC236}">
-                <a16:creationId xmlns:a16="http://schemas.microsoft.com/office/drawing/2014/main" id="{F7C886AA-BD81-445D-BB85-A6F153968E80}"/>
+                <a16:creationId xmlns:a16="http://schemas.microsoft.com/office/drawing/2014/main" id="{36B4ED3B-C6A8-464C-9910-C4F219260AD9}"/>
               </a:ext>
             </a:extLst>
           </p:cNvPr>
@@ -10697,7 +10705,7 @@
           <p:cNvPr id="14" name="">
             <a:extLst xmlns:a="http://schemas.openxmlformats.org/drawingml/2006/main">
               <a:ext uri="{FF2B5EF4-FFF2-40B4-BE49-F238E27FC236}">
-                <a16:creationId xmlns:a16="http://schemas.microsoft.com/office/drawing/2014/main" id="{A17B7136-11E2-448C-8B27-1E40966AE55F}"/>
+                <a16:creationId xmlns:a16="http://schemas.microsoft.com/office/drawing/2014/main" id="{8BD244CB-F8E1-45E0-9DFE-CAC557B1E378}"/>
               </a:ext>
             </a:extLst>
           </p:cNvPr>
@@ -10754,7 +10762,7 @@
           <p:cNvPr id="15" name="">
             <a:extLst xmlns:a="http://schemas.openxmlformats.org/drawingml/2006/main">
               <a:ext uri="{FF2B5EF4-FFF2-40B4-BE49-F238E27FC236}">
-                <a16:creationId xmlns:a16="http://schemas.microsoft.com/office/drawing/2014/main" id="{A7CA6BE7-C800-4639-82F2-17C2ADA29F1B}"/>
+                <a16:creationId xmlns:a16="http://schemas.microsoft.com/office/drawing/2014/main" id="{D59FBEAE-9814-4978-A05A-E8A5B9329C4B}"/>
               </a:ext>
             </a:extLst>
           </p:cNvPr>
@@ -10809,7 +10817,7 @@
     </p:spTree>
     <p:extLst>
       <p:ext uri="{BB962C8B-B14F-4D97-AF65-F5344CB8AC3E}">
-        <p14:creationId xmlns:p14="http://schemas.microsoft.com/office/powerpoint/2010/main" val="1339391786"/>
+        <p14:creationId xmlns:p14="http://schemas.microsoft.com/office/powerpoint/2010/main" val="1856287473"/>
       </p:ext>
     </p:extLst>
   </p:cSld>
@@ -10964,7 +10972,7 @@
           <p:cNvPr id="16" name="">
             <a:extLst xmlns:a="http://schemas.openxmlformats.org/drawingml/2006/main">
               <a:ext uri="{FF2B5EF4-FFF2-40B4-BE49-F238E27FC236}">
-                <a16:creationId xmlns:a16="http://schemas.microsoft.com/office/drawing/2014/main" id="{A6082D40-2AF7-4204-A1BF-39584E18C1F9}"/>
+                <a16:creationId xmlns:a16="http://schemas.microsoft.com/office/drawing/2014/main" id="{FA94E934-9D64-4CC3-B2D9-1E7243B4466A}"/>
               </a:ext>
             </a:extLst>
           </p:cNvPr>
@@ -10996,7 +11004,7 @@
           <p:cNvPr id="2" name="">
             <a:extLst xmlns:a="http://schemas.openxmlformats.org/drawingml/2006/main">
               <a:ext uri="{FF2B5EF4-FFF2-40B4-BE49-F238E27FC236}">
-                <a16:creationId xmlns:a16="http://schemas.microsoft.com/office/drawing/2014/main" id="{70F230D1-5099-4415-AD1A-5929917A9705}"/>
+                <a16:creationId xmlns:a16="http://schemas.microsoft.com/office/drawing/2014/main" id="{9C94E410-205C-4836-B7C8-2112204B2049}"/>
               </a:ext>
             </a:extLst>
           </p:cNvPr>
@@ -11053,7 +11061,7 @@
           <p:cNvPr id="3" name="">
             <a:extLst xmlns:a="http://schemas.openxmlformats.org/drawingml/2006/main">
               <a:ext uri="{FF2B5EF4-FFF2-40B4-BE49-F238E27FC236}">
-                <a16:creationId xmlns:a16="http://schemas.microsoft.com/office/drawing/2014/main" id="{A571FE6F-512B-46A2-866B-7C9ED13F6202}"/>
+                <a16:creationId xmlns:a16="http://schemas.microsoft.com/office/drawing/2014/main" id="{0476FD04-4FB4-40A6-AAD9-E3564E5EA7D5}"/>
               </a:ext>
             </a:extLst>
           </p:cNvPr>
@@ -11085,7 +11093,7 @@
           <p:cNvPr id="4" name="">
             <a:extLst xmlns:a="http://schemas.openxmlformats.org/drawingml/2006/main">
               <a:ext uri="{FF2B5EF4-FFF2-40B4-BE49-F238E27FC236}">
-                <a16:creationId xmlns:a16="http://schemas.microsoft.com/office/drawing/2014/main" id="{5E93B160-02D1-459C-A1EF-2E28E6EEB89F}"/>
+                <a16:creationId xmlns:a16="http://schemas.microsoft.com/office/drawing/2014/main" id="{44BB4A89-5DD4-4080-A134-4DFEDD095D53}"/>
               </a:ext>
             </a:extLst>
           </p:cNvPr>
@@ -11142,7 +11150,7 @@
           <p:cNvPr id="5" name="">
             <a:extLst xmlns:a="http://schemas.openxmlformats.org/drawingml/2006/main">
               <a:ext uri="{FF2B5EF4-FFF2-40B4-BE49-F238E27FC236}">
-                <a16:creationId xmlns:a16="http://schemas.microsoft.com/office/drawing/2014/main" id="{728468A2-8492-4894-A49F-996CF95090D9}"/>
+                <a16:creationId xmlns:a16="http://schemas.microsoft.com/office/drawing/2014/main" id="{EB4E2F48-C66B-40F0-B591-07A56ADC7574}"/>
               </a:ext>
             </a:extLst>
           </p:cNvPr>
@@ -11199,7 +11207,7 @@
           <p:cNvPr id="6" name="">
             <a:extLst xmlns:a="http://schemas.openxmlformats.org/drawingml/2006/main">
               <a:ext uri="{FF2B5EF4-FFF2-40B4-BE49-F238E27FC236}">
-                <a16:creationId xmlns:a16="http://schemas.microsoft.com/office/drawing/2014/main" id="{C1D33870-E4B6-448C-802B-DAB9CED70704}"/>
+                <a16:creationId xmlns:a16="http://schemas.microsoft.com/office/drawing/2014/main" id="{AB955BEF-CD15-445B-A8AD-91E2830D4112}"/>
               </a:ext>
             </a:extLst>
           </p:cNvPr>
@@ -11256,7 +11264,7 @@
           <p:cNvPr id="7" name="">
             <a:extLst xmlns:a="http://schemas.openxmlformats.org/drawingml/2006/main">
               <a:ext uri="{FF2B5EF4-FFF2-40B4-BE49-F238E27FC236}">
-                <a16:creationId xmlns:a16="http://schemas.microsoft.com/office/drawing/2014/main" id="{8725EE58-22B7-46B2-AA3D-D0FDD6F34BC9}"/>
+                <a16:creationId xmlns:a16="http://schemas.microsoft.com/office/drawing/2014/main" id="{396375C8-3090-4108-8524-4EC2A78B2E73}"/>
               </a:ext>
             </a:extLst>
           </p:cNvPr>
@@ -11288,7 +11296,7 @@
           <p:cNvPr id="8" name="">
             <a:extLst xmlns:a="http://schemas.openxmlformats.org/drawingml/2006/main">
               <a:ext uri="{FF2B5EF4-FFF2-40B4-BE49-F238E27FC236}">
-                <a16:creationId xmlns:a16="http://schemas.microsoft.com/office/drawing/2014/main" id="{F7F3B098-228E-43E8-A8E1-CF7539AB354E}"/>
+                <a16:creationId xmlns:a16="http://schemas.microsoft.com/office/drawing/2014/main" id="{9FC51EE5-481A-4BF0-B797-381AC58B48EB}"/>
               </a:ext>
             </a:extLst>
           </p:cNvPr>
@@ -11345,7 +11353,7 @@
           <p:cNvPr id="9" name="">
             <a:extLst xmlns:a="http://schemas.openxmlformats.org/drawingml/2006/main">
               <a:ext uri="{FF2B5EF4-FFF2-40B4-BE49-F238E27FC236}">
-                <a16:creationId xmlns:a16="http://schemas.microsoft.com/office/drawing/2014/main" id="{476421BA-B2E5-45E4-8980-3A7FBF75F29F}"/>
+                <a16:creationId xmlns:a16="http://schemas.microsoft.com/office/drawing/2014/main" id="{CC0F4979-EC0A-4CC6-98F3-7A2D4D69CB08}"/>
               </a:ext>
             </a:extLst>
           </p:cNvPr>
@@ -11406,7 +11414,7 @@
           <p:nvPr/>
         </p:nvPicPr>
         <p:blipFill>
-          <a:blip xmlns:r="http://schemas.openxmlformats.org/officeDocument/2006/relationships" xmlns:a="http://schemas.openxmlformats.org/drawingml/2006/main" r:embed="R7a0a633831b44ca9"/>
+          <a:blip xmlns:r="http://schemas.openxmlformats.org/officeDocument/2006/relationships" xmlns:a="http://schemas.openxmlformats.org/drawingml/2006/main" r:embed="R99588cf9adf64f52"/>
           <a:stretch xmlns:a="http://schemas.openxmlformats.org/drawingml/2006/main"/>
         </p:blipFill>
         <p:spPr>
@@ -11424,7 +11432,7 @@
           <p:cNvPr id="11" name="">
             <a:extLst xmlns:a="http://schemas.openxmlformats.org/drawingml/2006/main">
               <a:ext uri="{FF2B5EF4-FFF2-40B4-BE49-F238E27FC236}">
-                <a16:creationId xmlns:a16="http://schemas.microsoft.com/office/drawing/2014/main" id="{322F8D9C-42F5-4A5B-A0BF-8B290353B5D1}"/>
+                <a16:creationId xmlns:a16="http://schemas.microsoft.com/office/drawing/2014/main" id="{3FB2C524-CDCD-49BD-B1D2-99B76188617D}"/>
               </a:ext>
             </a:extLst>
           </p:cNvPr>
@@ -11481,7 +11489,7 @@
           <p:cNvPr id="12" name="">
             <a:extLst xmlns:a="http://schemas.openxmlformats.org/drawingml/2006/main">
               <a:ext uri="{FF2B5EF4-FFF2-40B4-BE49-F238E27FC236}">
-                <a16:creationId xmlns:a16="http://schemas.microsoft.com/office/drawing/2014/main" id="{C09673C1-E7EB-4B4F-9553-6322A4FF41B9}"/>
+                <a16:creationId xmlns:a16="http://schemas.microsoft.com/office/drawing/2014/main" id="{79D8CA6D-01C2-4BF2-993D-3C08EFA37EB0}"/>
               </a:ext>
             </a:extLst>
           </p:cNvPr>
@@ -11538,7 +11546,7 @@
           <p:cNvPr id="13" name="">
             <a:extLst xmlns:a="http://schemas.openxmlformats.org/drawingml/2006/main">
               <a:ext uri="{FF2B5EF4-FFF2-40B4-BE49-F238E27FC236}">
-                <a16:creationId xmlns:a16="http://schemas.microsoft.com/office/drawing/2014/main" id="{D58AABE9-8014-4A64-8B6B-A819B2FB1FF7}"/>
+                <a16:creationId xmlns:a16="http://schemas.microsoft.com/office/drawing/2014/main" id="{4ACC989F-7518-465D-BD0C-BF0C7F03A413}"/>
               </a:ext>
             </a:extLst>
           </p:cNvPr>
@@ -11570,7 +11578,7 @@
           <p:cNvPr id="14" name="">
             <a:extLst xmlns:a="http://schemas.openxmlformats.org/drawingml/2006/main">
               <a:ext uri="{FF2B5EF4-FFF2-40B4-BE49-F238E27FC236}">
-                <a16:creationId xmlns:a16="http://schemas.microsoft.com/office/drawing/2014/main" id="{DE48B9D5-A8B6-4860-BD3F-C57328D72651}"/>
+                <a16:creationId xmlns:a16="http://schemas.microsoft.com/office/drawing/2014/main" id="{DE599621-2DA0-4AA0-A047-E988FD6F3A0B}"/>
               </a:ext>
             </a:extLst>
           </p:cNvPr>
@@ -11627,7 +11635,7 @@
           <p:cNvPr id="15" name="">
             <a:extLst xmlns:a="http://schemas.openxmlformats.org/drawingml/2006/main">
               <a:ext uri="{FF2B5EF4-FFF2-40B4-BE49-F238E27FC236}">
-                <a16:creationId xmlns:a16="http://schemas.microsoft.com/office/drawing/2014/main" id="{4E4582B0-60A0-4AD7-8724-0B9889C4C6D7}"/>
+                <a16:creationId xmlns:a16="http://schemas.microsoft.com/office/drawing/2014/main" id="{70611E29-E0B7-4093-8078-32BB47F7D681}"/>
               </a:ext>
             </a:extLst>
           </p:cNvPr>
@@ -11682,7 +11690,7 @@
     </p:spTree>
     <p:extLst>
       <p:ext uri="{BB962C8B-B14F-4D97-AF65-F5344CB8AC3E}">
-        <p14:creationId xmlns:p14="http://schemas.microsoft.com/office/powerpoint/2010/main" val="11279668"/>
+        <p14:creationId xmlns:p14="http://schemas.microsoft.com/office/powerpoint/2010/main" val="2105485801"/>
       </p:ext>
     </p:extLst>
   </p:cSld>
@@ -11837,7 +11845,7 @@
           <p:cNvPr id="23" name="">
             <a:extLst xmlns:a="http://schemas.openxmlformats.org/drawingml/2006/main">
               <a:ext uri="{FF2B5EF4-FFF2-40B4-BE49-F238E27FC236}">
-                <a16:creationId xmlns:a16="http://schemas.microsoft.com/office/drawing/2014/main" id="{B399D7A3-EFD5-44B2-9C05-9D627E8C57EF}"/>
+                <a16:creationId xmlns:a16="http://schemas.microsoft.com/office/drawing/2014/main" id="{DC1FA389-DDA1-4896-9CCD-67EBF64DB78A}"/>
               </a:ext>
             </a:extLst>
           </p:cNvPr>
@@ -11869,7 +11877,7 @@
           <p:cNvPr id="2" name="">
             <a:extLst xmlns:a="http://schemas.openxmlformats.org/drawingml/2006/main">
               <a:ext uri="{FF2B5EF4-FFF2-40B4-BE49-F238E27FC236}">
-                <a16:creationId xmlns:a16="http://schemas.microsoft.com/office/drawing/2014/main" id="{323DC4F2-E951-4543-8001-8772E4119CF4}"/>
+                <a16:creationId xmlns:a16="http://schemas.microsoft.com/office/drawing/2014/main" id="{3C8324D8-D65B-4558-8A18-DF9574904B11}"/>
               </a:ext>
             </a:extLst>
           </p:cNvPr>
@@ -11926,7 +11934,7 @@
           <p:cNvPr id="3" name="">
             <a:extLst xmlns:a="http://schemas.openxmlformats.org/drawingml/2006/main">
               <a:ext uri="{FF2B5EF4-FFF2-40B4-BE49-F238E27FC236}">
-                <a16:creationId xmlns:a16="http://schemas.microsoft.com/office/drawing/2014/main" id="{A85922CF-F91C-4202-BA13-8E7E399CF9A3}"/>
+                <a16:creationId xmlns:a16="http://schemas.microsoft.com/office/drawing/2014/main" id="{97CAD19C-F648-4119-AAD4-3E6855CC3D1C}"/>
               </a:ext>
             </a:extLst>
           </p:cNvPr>
@@ -11958,7 +11966,7 @@
           <p:cNvPr id="4" name="">
             <a:extLst xmlns:a="http://schemas.openxmlformats.org/drawingml/2006/main">
               <a:ext uri="{FF2B5EF4-FFF2-40B4-BE49-F238E27FC236}">
-                <a16:creationId xmlns:a16="http://schemas.microsoft.com/office/drawing/2014/main" id="{DEEE15B5-5B15-4456-8D6A-95A1AF433BCD}"/>
+                <a16:creationId xmlns:a16="http://schemas.microsoft.com/office/drawing/2014/main" id="{AC7254E7-0F63-4015-8ABD-3C0C241D4944}"/>
               </a:ext>
             </a:extLst>
           </p:cNvPr>
@@ -12015,7 +12023,7 @@
           <p:cNvPr id="5" name="">
             <a:extLst xmlns:a="http://schemas.openxmlformats.org/drawingml/2006/main">
               <a:ext uri="{FF2B5EF4-FFF2-40B4-BE49-F238E27FC236}">
-                <a16:creationId xmlns:a16="http://schemas.microsoft.com/office/drawing/2014/main" id="{E2E41495-D67F-45BC-AD61-018355543047}"/>
+                <a16:creationId xmlns:a16="http://schemas.microsoft.com/office/drawing/2014/main" id="{88FC079B-4945-42CD-8443-ED89911FA973}"/>
               </a:ext>
             </a:extLst>
           </p:cNvPr>
@@ -12072,7 +12080,7 @@
           <p:cNvPr id="6" name="">
             <a:extLst xmlns:a="http://schemas.openxmlformats.org/drawingml/2006/main">
               <a:ext uri="{FF2B5EF4-FFF2-40B4-BE49-F238E27FC236}">
-                <a16:creationId xmlns:a16="http://schemas.microsoft.com/office/drawing/2014/main" id="{0DB12499-9A82-4328-83F6-AE3EF844C9D2}"/>
+                <a16:creationId xmlns:a16="http://schemas.microsoft.com/office/drawing/2014/main" id="{4B22FD10-F95F-415B-B77B-973362DF5648}"/>
               </a:ext>
             </a:extLst>
           </p:cNvPr>
@@ -12129,7 +12137,7 @@
           <p:cNvPr id="7" name="">
             <a:extLst xmlns:a="http://schemas.openxmlformats.org/drawingml/2006/main">
               <a:ext uri="{FF2B5EF4-FFF2-40B4-BE49-F238E27FC236}">
-                <a16:creationId xmlns:a16="http://schemas.microsoft.com/office/drawing/2014/main" id="{2AC1C791-CBD9-4802-973A-F818AF45FC2A}"/>
+                <a16:creationId xmlns:a16="http://schemas.microsoft.com/office/drawing/2014/main" id="{062EA02D-41E1-4388-9DDE-D7F68693B7DD}"/>
               </a:ext>
             </a:extLst>
           </p:cNvPr>
@@ -12161,7 +12169,7 @@
           <p:cNvPr id="8" name="">
             <a:extLst xmlns:a="http://schemas.openxmlformats.org/drawingml/2006/main">
               <a:ext uri="{FF2B5EF4-FFF2-40B4-BE49-F238E27FC236}">
-                <a16:creationId xmlns:a16="http://schemas.microsoft.com/office/drawing/2014/main" id="{38B1CD00-2972-448E-BA62-27352133656F}"/>
+                <a16:creationId xmlns:a16="http://schemas.microsoft.com/office/drawing/2014/main" id="{08D3384A-ADA8-4B8C-A0BA-412FCE468EA0}"/>
               </a:ext>
             </a:extLst>
           </p:cNvPr>
@@ -12218,7 +12226,7 @@
           <p:cNvPr id="9" name="">
             <a:extLst xmlns:a="http://schemas.openxmlformats.org/drawingml/2006/main">
               <a:ext uri="{FF2B5EF4-FFF2-40B4-BE49-F238E27FC236}">
-                <a16:creationId xmlns:a16="http://schemas.microsoft.com/office/drawing/2014/main" id="{F5220A67-DE19-427D-8EBE-05DD77ACFD92}"/>
+                <a16:creationId xmlns:a16="http://schemas.microsoft.com/office/drawing/2014/main" id="{67E255B1-DF89-41C4-BA7B-6DBBF4970980}"/>
               </a:ext>
             </a:extLst>
           </p:cNvPr>
@@ -12275,7 +12283,7 @@
           <p:cNvPr id="10" name="">
             <a:extLst xmlns:a="http://schemas.openxmlformats.org/drawingml/2006/main">
               <a:ext uri="{FF2B5EF4-FFF2-40B4-BE49-F238E27FC236}">
-                <a16:creationId xmlns:a16="http://schemas.microsoft.com/office/drawing/2014/main" id="{691A6549-E437-4E1D-926B-E1B1030AB902}"/>
+                <a16:creationId xmlns:a16="http://schemas.microsoft.com/office/drawing/2014/main" id="{011FA542-3A64-4BD7-BA4A-C18ACA0A6C72}"/>
               </a:ext>
             </a:extLst>
           </p:cNvPr>
@@ -12309,7 +12317,7 @@
           <p:cNvPr id="11" name="">
             <a:extLst xmlns:a="http://schemas.openxmlformats.org/drawingml/2006/main">
               <a:ext uri="{FF2B5EF4-FFF2-40B4-BE49-F238E27FC236}">
-                <a16:creationId xmlns:a16="http://schemas.microsoft.com/office/drawing/2014/main" id="{710F7558-92CA-475A-9126-708E20D8C604}"/>
+                <a16:creationId xmlns:a16="http://schemas.microsoft.com/office/drawing/2014/main" id="{04498452-89AB-427D-9D43-B143A444BE02}"/>
               </a:ext>
             </a:extLst>
           </p:cNvPr>
@@ -12341,7 +12349,7 @@
           <p:cNvPr id="12" name="">
             <a:extLst xmlns:a="http://schemas.openxmlformats.org/drawingml/2006/main">
               <a:ext uri="{FF2B5EF4-FFF2-40B4-BE49-F238E27FC236}">
-                <a16:creationId xmlns:a16="http://schemas.microsoft.com/office/drawing/2014/main" id="{3B6D9EC8-2D13-495A-B211-FE50BD2A8F55}"/>
+                <a16:creationId xmlns:a16="http://schemas.microsoft.com/office/drawing/2014/main" id="{3E96B0A8-0E57-453E-AE24-6C8E2E2B0F71}"/>
               </a:ext>
             </a:extLst>
           </p:cNvPr>
@@ -12398,7 +12406,7 @@
           <p:cNvPr id="13" name="">
             <a:extLst xmlns:a="http://schemas.openxmlformats.org/drawingml/2006/main">
               <a:ext uri="{FF2B5EF4-FFF2-40B4-BE49-F238E27FC236}">
-                <a16:creationId xmlns:a16="http://schemas.microsoft.com/office/drawing/2014/main" id="{B946BEEA-950F-4297-BC93-AD4E38D71B36}"/>
+                <a16:creationId xmlns:a16="http://schemas.microsoft.com/office/drawing/2014/main" id="{DD8F19E0-FA80-4D90-B49F-E037476DE128}"/>
               </a:ext>
             </a:extLst>
           </p:cNvPr>
@@ -12455,7 +12463,7 @@
           <p:cNvPr id="14" name="">
             <a:extLst xmlns:a="http://schemas.openxmlformats.org/drawingml/2006/main">
               <a:ext uri="{FF2B5EF4-FFF2-40B4-BE49-F238E27FC236}">
-                <a16:creationId xmlns:a16="http://schemas.microsoft.com/office/drawing/2014/main" id="{69A54E97-C7A4-46A0-BB94-732E7B715882}"/>
+                <a16:creationId xmlns:a16="http://schemas.microsoft.com/office/drawing/2014/main" id="{AD63914A-690D-4C1B-B67B-70E3A6AB0956}"/>
               </a:ext>
             </a:extLst>
           </p:cNvPr>
@@ -12489,7 +12497,7 @@
           <p:cNvPr id="15" name="">
             <a:extLst xmlns:a="http://schemas.openxmlformats.org/drawingml/2006/main">
               <a:ext uri="{FF2B5EF4-FFF2-40B4-BE49-F238E27FC236}">
-                <a16:creationId xmlns:a16="http://schemas.microsoft.com/office/drawing/2014/main" id="{DCC32D1A-C5D1-4F60-ABE7-75A9DB4F3763}"/>
+                <a16:creationId xmlns:a16="http://schemas.microsoft.com/office/drawing/2014/main" id="{E1AF38DA-6014-4ED0-BC59-7F16474F0256}"/>
               </a:ext>
             </a:extLst>
           </p:cNvPr>
@@ -12521,7 +12529,7 @@
           <p:cNvPr id="16" name="">
             <a:extLst xmlns:a="http://schemas.openxmlformats.org/drawingml/2006/main">
               <a:ext uri="{FF2B5EF4-FFF2-40B4-BE49-F238E27FC236}">
-                <a16:creationId xmlns:a16="http://schemas.microsoft.com/office/drawing/2014/main" id="{FE01C832-E046-4649-AB85-5448C567BD19}"/>
+                <a16:creationId xmlns:a16="http://schemas.microsoft.com/office/drawing/2014/main" id="{B43E40C4-86E7-4EB3-8C3B-E1924AAEF0BA}"/>
               </a:ext>
             </a:extLst>
           </p:cNvPr>
@@ -12578,7 +12586,7 @@
           <p:cNvPr id="17" name="">
             <a:extLst xmlns:a="http://schemas.openxmlformats.org/drawingml/2006/main">
               <a:ext uri="{FF2B5EF4-FFF2-40B4-BE49-F238E27FC236}">
-                <a16:creationId xmlns:a16="http://schemas.microsoft.com/office/drawing/2014/main" id="{24D114FC-3544-446C-827A-1B9677A37B4C}"/>
+                <a16:creationId xmlns:a16="http://schemas.microsoft.com/office/drawing/2014/main" id="{90A99CC0-6AEB-4E8E-A89A-8C7D3BBBE3B7}"/>
               </a:ext>
             </a:extLst>
           </p:cNvPr>
@@ -12635,7 +12643,7 @@
           <p:cNvPr id="18" name="">
             <a:extLst xmlns:a="http://schemas.openxmlformats.org/drawingml/2006/main">
               <a:ext uri="{FF2B5EF4-FFF2-40B4-BE49-F238E27FC236}">
-                <a16:creationId xmlns:a16="http://schemas.microsoft.com/office/drawing/2014/main" id="{9247A9AC-F7CD-495B-B842-80ECA99EA30A}"/>
+                <a16:creationId xmlns:a16="http://schemas.microsoft.com/office/drawing/2014/main" id="{C26ACCB3-95FD-4795-AAF7-1AA0C051CC3A}"/>
               </a:ext>
             </a:extLst>
           </p:cNvPr>
@@ -12669,7 +12677,7 @@
           <p:cNvPr id="19" name="">
             <a:extLst xmlns:a="http://schemas.openxmlformats.org/drawingml/2006/main">
               <a:ext uri="{FF2B5EF4-FFF2-40B4-BE49-F238E27FC236}">
-                <a16:creationId xmlns:a16="http://schemas.microsoft.com/office/drawing/2014/main" id="{1009445A-B732-43F6-8EED-842F6B1F2D4D}"/>
+                <a16:creationId xmlns:a16="http://schemas.microsoft.com/office/drawing/2014/main" id="{543CE4D4-1E71-4D5D-8467-89FD7A5297D0}"/>
               </a:ext>
             </a:extLst>
           </p:cNvPr>
@@ -12701,7 +12709,7 @@
           <p:cNvPr id="20" name="">
             <a:extLst xmlns:a="http://schemas.openxmlformats.org/drawingml/2006/main">
               <a:ext uri="{FF2B5EF4-FFF2-40B4-BE49-F238E27FC236}">
-                <a16:creationId xmlns:a16="http://schemas.microsoft.com/office/drawing/2014/main" id="{0713A86D-D337-44A1-86A4-6ABCDB6CAAD4}"/>
+                <a16:creationId xmlns:a16="http://schemas.microsoft.com/office/drawing/2014/main" id="{68BE5159-EA15-4630-A90B-00AB97603CFF}"/>
               </a:ext>
             </a:extLst>
           </p:cNvPr>
@@ -12758,7 +12766,7 @@
           <p:cNvPr id="21" name="">
             <a:extLst xmlns:a="http://schemas.openxmlformats.org/drawingml/2006/main">
               <a:ext uri="{FF2B5EF4-FFF2-40B4-BE49-F238E27FC236}">
-                <a16:creationId xmlns:a16="http://schemas.microsoft.com/office/drawing/2014/main" id="{40B22730-B041-4A94-B1BE-751EA3388B60}"/>
+                <a16:creationId xmlns:a16="http://schemas.microsoft.com/office/drawing/2014/main" id="{EC3E90FB-86C3-4D93-8B43-62C580D01CDF}"/>
               </a:ext>
             </a:extLst>
           </p:cNvPr>
@@ -12815,7 +12823,7 @@
           <p:cNvPr id="22" name="">
             <a:extLst xmlns:a="http://schemas.openxmlformats.org/drawingml/2006/main">
               <a:ext uri="{FF2B5EF4-FFF2-40B4-BE49-F238E27FC236}">
-                <a16:creationId xmlns:a16="http://schemas.microsoft.com/office/drawing/2014/main" id="{9CCD644C-C37F-4E60-9B38-2C1D5E0F898D}"/>
+                <a16:creationId xmlns:a16="http://schemas.microsoft.com/office/drawing/2014/main" id="{06D95561-2E5F-494A-B415-0826BB529783}"/>
               </a:ext>
             </a:extLst>
           </p:cNvPr>
@@ -12870,7 +12878,7 @@
     </p:spTree>
     <p:extLst>
       <p:ext uri="{BB962C8B-B14F-4D97-AF65-F5344CB8AC3E}">
-        <p14:creationId xmlns:p14="http://schemas.microsoft.com/office/powerpoint/2010/main" val="1637067357"/>
+        <p14:creationId xmlns:p14="http://schemas.microsoft.com/office/powerpoint/2010/main" val="1330598328"/>
       </p:ext>
     </p:extLst>
   </p:cSld>
@@ -13071,7 +13079,7 @@
           <p:cNvPr id="22" name="">
             <a:extLst xmlns:a="http://schemas.openxmlformats.org/drawingml/2006/main">
               <a:ext uri="{FF2B5EF4-FFF2-40B4-BE49-F238E27FC236}">
-                <a16:creationId xmlns:a16="http://schemas.microsoft.com/office/drawing/2014/main" id="{0F499E56-BBB8-4DCA-ADF0-C1B1BFC2E35E}"/>
+                <a16:creationId xmlns:a16="http://schemas.microsoft.com/office/drawing/2014/main" id="{9AF91B92-AC31-4AD4-AF2E-76C3DC392D70}"/>
               </a:ext>
             </a:extLst>
           </p:cNvPr>
@@ -13103,7 +13111,7 @@
           <p:cNvPr id="2" name="">
             <a:extLst xmlns:a="http://schemas.openxmlformats.org/drawingml/2006/main">
               <a:ext uri="{FF2B5EF4-FFF2-40B4-BE49-F238E27FC236}">
-                <a16:creationId xmlns:a16="http://schemas.microsoft.com/office/drawing/2014/main" id="{FE32BC0C-0469-4C59-B44B-C1503CE5D0D3}"/>
+                <a16:creationId xmlns:a16="http://schemas.microsoft.com/office/drawing/2014/main" id="{3ACE80C9-0142-4E54-B6AC-A434F758157A}"/>
               </a:ext>
             </a:extLst>
           </p:cNvPr>
@@ -13160,7 +13168,7 @@
           <p:cNvPr id="3" name="">
             <a:extLst xmlns:a="http://schemas.openxmlformats.org/drawingml/2006/main">
               <a:ext uri="{FF2B5EF4-FFF2-40B4-BE49-F238E27FC236}">
-                <a16:creationId xmlns:a16="http://schemas.microsoft.com/office/drawing/2014/main" id="{494596FE-6DB5-4D8A-806A-EEB891EC91BF}"/>
+                <a16:creationId xmlns:a16="http://schemas.microsoft.com/office/drawing/2014/main" id="{4269A060-2B05-4FEB-8085-FB79720862C8}"/>
               </a:ext>
             </a:extLst>
           </p:cNvPr>
@@ -13192,7 +13200,7 @@
           <p:cNvPr id="4" name="">
             <a:extLst xmlns:a="http://schemas.openxmlformats.org/drawingml/2006/main">
               <a:ext uri="{FF2B5EF4-FFF2-40B4-BE49-F238E27FC236}">
-                <a16:creationId xmlns:a16="http://schemas.microsoft.com/office/drawing/2014/main" id="{8DD556AA-D217-4E76-B5A1-3F0298FCECAF}"/>
+                <a16:creationId xmlns:a16="http://schemas.microsoft.com/office/drawing/2014/main" id="{E55A5CB6-EC3E-4309-ABC6-373A9F0685F6}"/>
               </a:ext>
             </a:extLst>
           </p:cNvPr>
@@ -13249,7 +13257,7 @@
           <p:cNvPr id="5" name="">
             <a:extLst xmlns:a="http://schemas.openxmlformats.org/drawingml/2006/main">
               <a:ext uri="{FF2B5EF4-FFF2-40B4-BE49-F238E27FC236}">
-                <a16:creationId xmlns:a16="http://schemas.microsoft.com/office/drawing/2014/main" id="{69E61C9F-FF1F-48C8-9F26-A40D0BEC8817}"/>
+                <a16:creationId xmlns:a16="http://schemas.microsoft.com/office/drawing/2014/main" id="{2528D33B-2E15-4176-B2C7-8F5BD26443E0}"/>
               </a:ext>
             </a:extLst>
           </p:cNvPr>
@@ -13306,7 +13314,7 @@
           <p:cNvPr id="6" name="">
             <a:extLst xmlns:a="http://schemas.openxmlformats.org/drawingml/2006/main">
               <a:ext uri="{FF2B5EF4-FFF2-40B4-BE49-F238E27FC236}">
-                <a16:creationId xmlns:a16="http://schemas.microsoft.com/office/drawing/2014/main" id="{6077AAFA-17E9-49B9-9908-F936F1A43DD1}"/>
+                <a16:creationId xmlns:a16="http://schemas.microsoft.com/office/drawing/2014/main" id="{7D8ADD4B-CF90-4EF4-A152-9A3E3B0FBFE3}"/>
               </a:ext>
             </a:extLst>
           </p:cNvPr>
@@ -13363,7 +13371,7 @@
           <p:cNvPr id="7" name="">
             <a:extLst xmlns:a="http://schemas.openxmlformats.org/drawingml/2006/main">
               <a:ext uri="{FF2B5EF4-FFF2-40B4-BE49-F238E27FC236}">
-                <a16:creationId xmlns:a16="http://schemas.microsoft.com/office/drawing/2014/main" id="{416A294B-3F88-4747-BC26-C2760298531E}"/>
+                <a16:creationId xmlns:a16="http://schemas.microsoft.com/office/drawing/2014/main" id="{68B69595-4866-4C7A-B3B1-2FABF6A7CF8A}"/>
               </a:ext>
             </a:extLst>
           </p:cNvPr>
@@ -13395,7 +13403,7 @@
           <p:cNvPr id="8" name="">
             <a:extLst xmlns:a="http://schemas.openxmlformats.org/drawingml/2006/main">
               <a:ext uri="{FF2B5EF4-FFF2-40B4-BE49-F238E27FC236}">
-                <a16:creationId xmlns:a16="http://schemas.microsoft.com/office/drawing/2014/main" id="{BBC51C18-1088-44B9-A001-FF2040186A5C}"/>
+                <a16:creationId xmlns:a16="http://schemas.microsoft.com/office/drawing/2014/main" id="{05D1683F-D9B1-4C86-B5A0-8E0B5511AFD8}"/>
               </a:ext>
             </a:extLst>
           </p:cNvPr>
@@ -13452,7 +13460,7 @@
           <p:cNvPr id="9" name="">
             <a:extLst xmlns:a="http://schemas.openxmlformats.org/drawingml/2006/main">
               <a:ext uri="{FF2B5EF4-FFF2-40B4-BE49-F238E27FC236}">
-                <a16:creationId xmlns:a16="http://schemas.microsoft.com/office/drawing/2014/main" id="{F1A00CD6-BB3F-4671-AFBC-349412B78C35}"/>
+                <a16:creationId xmlns:a16="http://schemas.microsoft.com/office/drawing/2014/main" id="{7681816B-02E2-43C2-9A02-3157D984E79C}"/>
               </a:ext>
             </a:extLst>
           </p:cNvPr>
@@ -13509,7 +13517,7 @@
           <p:cNvPr id="10" name="">
             <a:extLst xmlns:a="http://schemas.openxmlformats.org/drawingml/2006/main">
               <a:ext uri="{FF2B5EF4-FFF2-40B4-BE49-F238E27FC236}">
-                <a16:creationId xmlns:a16="http://schemas.microsoft.com/office/drawing/2014/main" id="{DF176848-0F2F-441D-8BE5-7E6DC33DE112}"/>
+                <a16:creationId xmlns:a16="http://schemas.microsoft.com/office/drawing/2014/main" id="{17C18EF2-00CA-4F0D-9E05-F7FBD1EA2C2E}"/>
               </a:ext>
             </a:extLst>
           </p:cNvPr>
@@ -13543,7 +13551,7 @@
           <p:cNvPr id="11" name="">
             <a:extLst xmlns:a="http://schemas.openxmlformats.org/drawingml/2006/main">
               <a:ext uri="{FF2B5EF4-FFF2-40B4-BE49-F238E27FC236}">
-                <a16:creationId xmlns:a16="http://schemas.microsoft.com/office/drawing/2014/main" id="{E687121D-7270-4CE2-8AF2-5694810A4504}"/>
+                <a16:creationId xmlns:a16="http://schemas.microsoft.com/office/drawing/2014/main" id="{9E1CFF10-2F0A-4005-AED3-0EA554D9C630}"/>
               </a:ext>
             </a:extLst>
           </p:cNvPr>
@@ -13575,7 +13583,7 @@
           <p:cNvPr id="12" name="">
             <a:extLst xmlns:a="http://schemas.openxmlformats.org/drawingml/2006/main">
               <a:ext uri="{FF2B5EF4-FFF2-40B4-BE49-F238E27FC236}">
-                <a16:creationId xmlns:a16="http://schemas.microsoft.com/office/drawing/2014/main" id="{E5AFBCE7-8570-4ECA-9F4F-35868E46CC07}"/>
+                <a16:creationId xmlns:a16="http://schemas.microsoft.com/office/drawing/2014/main" id="{57911ACB-A98C-4BA3-8C69-F014AB9689B3}"/>
               </a:ext>
             </a:extLst>
           </p:cNvPr>
@@ -13632,7 +13640,7 @@
           <p:cNvPr id="13" name="">
             <a:extLst xmlns:a="http://schemas.openxmlformats.org/drawingml/2006/main">
               <a:ext uri="{FF2B5EF4-FFF2-40B4-BE49-F238E27FC236}">
-                <a16:creationId xmlns:a16="http://schemas.microsoft.com/office/drawing/2014/main" id="{423FC595-2C39-4262-873D-0F2016FAD939}"/>
+                <a16:creationId xmlns:a16="http://schemas.microsoft.com/office/drawing/2014/main" id="{FB4B6CE1-8C29-4767-9466-691557179EBB}"/>
               </a:ext>
             </a:extLst>
           </p:cNvPr>
@@ -13689,7 +13697,7 @@
           <p:cNvPr id="14" name="">
             <a:extLst xmlns:a="http://schemas.openxmlformats.org/drawingml/2006/main">
               <a:ext uri="{FF2B5EF4-FFF2-40B4-BE49-F238E27FC236}">
-                <a16:creationId xmlns:a16="http://schemas.microsoft.com/office/drawing/2014/main" id="{556FB3AB-BC3D-495F-8C4B-1FF15B3EB428}"/>
+                <a16:creationId xmlns:a16="http://schemas.microsoft.com/office/drawing/2014/main" id="{089E55D4-F5C0-4ADC-A525-86420CAD34DA}"/>
               </a:ext>
             </a:extLst>
           </p:cNvPr>
@@ -13723,7 +13731,7 @@
           <p:cNvPr id="15" name="">
             <a:extLst xmlns:a="http://schemas.openxmlformats.org/drawingml/2006/main">
               <a:ext uri="{FF2B5EF4-FFF2-40B4-BE49-F238E27FC236}">
-                <a16:creationId xmlns:a16="http://schemas.microsoft.com/office/drawing/2014/main" id="{AF40D33F-EF16-4F25-ADFB-9B79D1B52A6E}"/>
+                <a16:creationId xmlns:a16="http://schemas.microsoft.com/office/drawing/2014/main" id="{18AF5B4D-88FB-49A8-86A2-DF5342B446EE}"/>
               </a:ext>
             </a:extLst>
           </p:cNvPr>
@@ -13755,7 +13763,7 @@
           <p:cNvPr id="16" name="">
             <a:extLst xmlns:a="http://schemas.openxmlformats.org/drawingml/2006/main">
               <a:ext uri="{FF2B5EF4-FFF2-40B4-BE49-F238E27FC236}">
-                <a16:creationId xmlns:a16="http://schemas.microsoft.com/office/drawing/2014/main" id="{C6154C92-18ED-4080-91A3-EBC1C1544A91}"/>
+                <a16:creationId xmlns:a16="http://schemas.microsoft.com/office/drawing/2014/main" id="{F432570C-DE2A-44C8-A271-FE3E1E7D4641}"/>
               </a:ext>
             </a:extLst>
           </p:cNvPr>
@@ -13812,7 +13820,7 @@
           <p:cNvPr id="17" name="">
             <a:extLst xmlns:a="http://schemas.openxmlformats.org/drawingml/2006/main">
               <a:ext uri="{FF2B5EF4-FFF2-40B4-BE49-F238E27FC236}">
-                <a16:creationId xmlns:a16="http://schemas.microsoft.com/office/drawing/2014/main" id="{B89C8D27-486E-49C1-91CE-376667E5F12B}"/>
+                <a16:creationId xmlns:a16="http://schemas.microsoft.com/office/drawing/2014/main" id="{90BB9444-5FF7-4101-9A5F-CBE367394527}"/>
               </a:ext>
             </a:extLst>
           </p:cNvPr>
@@ -13869,7 +13877,7 @@
           <p:cNvPr id="18" name="">
             <a:extLst xmlns:a="http://schemas.openxmlformats.org/drawingml/2006/main">
               <a:ext uri="{FF2B5EF4-FFF2-40B4-BE49-F238E27FC236}">
-                <a16:creationId xmlns:a16="http://schemas.microsoft.com/office/drawing/2014/main" id="{DF95B85F-F0D9-4FA1-924E-749427522497}"/>
+                <a16:creationId xmlns:a16="http://schemas.microsoft.com/office/drawing/2014/main" id="{F1FD997D-8DB7-4CD5-9D2A-563FD01D5441}"/>
               </a:ext>
             </a:extLst>
           </p:cNvPr>
@@ -13903,7 +13911,7 @@
           <p:cNvPr id="19" name="">
             <a:extLst xmlns:a="http://schemas.openxmlformats.org/drawingml/2006/main">
               <a:ext uri="{FF2B5EF4-FFF2-40B4-BE49-F238E27FC236}">
-                <a16:creationId xmlns:a16="http://schemas.microsoft.com/office/drawing/2014/main" id="{997AFEE8-8085-435D-9450-34630E39961D}"/>
+                <a16:creationId xmlns:a16="http://schemas.microsoft.com/office/drawing/2014/main" id="{76B54916-9A47-4BED-B919-86946DE3863D}"/>
               </a:ext>
             </a:extLst>
           </p:cNvPr>
@@ -13935,7 +13943,7 @@
           <p:cNvPr id="20" name="">
             <a:extLst xmlns:a="http://schemas.openxmlformats.org/drawingml/2006/main">
               <a:ext uri="{FF2B5EF4-FFF2-40B4-BE49-F238E27FC236}">
-                <a16:creationId xmlns:a16="http://schemas.microsoft.com/office/drawing/2014/main" id="{AF46B983-022F-4866-8AFF-1E8205C69ED1}"/>
+                <a16:creationId xmlns:a16="http://schemas.microsoft.com/office/drawing/2014/main" id="{406E7C8D-51F6-4E28-89A4-5039E9FA77FF}"/>
               </a:ext>
             </a:extLst>
           </p:cNvPr>
@@ -13992,7 +14000,7 @@
           <p:cNvPr id="21" name="">
             <a:extLst xmlns:a="http://schemas.openxmlformats.org/drawingml/2006/main">
               <a:ext uri="{FF2B5EF4-FFF2-40B4-BE49-F238E27FC236}">
-                <a16:creationId xmlns:a16="http://schemas.microsoft.com/office/drawing/2014/main" id="{B88BCC4A-D4B2-42E6-910B-BD00AAE9B52E}"/>
+                <a16:creationId xmlns:a16="http://schemas.microsoft.com/office/drawing/2014/main" id="{73FA35AD-DBBF-4394-9F52-612886B31682}"/>
               </a:ext>
             </a:extLst>
           </p:cNvPr>
@@ -14047,7 +14055,7 @@
     </p:spTree>
     <p:extLst>
       <p:ext uri="{BB962C8B-B14F-4D97-AF65-F5344CB8AC3E}">
-        <p14:creationId xmlns:p14="http://schemas.microsoft.com/office/powerpoint/2010/main" val="864527525"/>
+        <p14:creationId xmlns:p14="http://schemas.microsoft.com/office/powerpoint/2010/main" val="530264155"/>
       </p:ext>
     </p:extLst>
   </p:cSld>
